--- a/ma3rifah-ai/docs/sales/ma3rifah-pitch.pptx
+++ b/ma3rifah-ai/docs/sales/ma3rifah-pitch.pptx
@@ -14,10 +14,9 @@
     <p:sldId id="262" r:id="rId8"/>
     <p:sldId id="263" r:id="rId9"/>
     <p:sldId id="264" r:id="rId10"/>
-    <p:sldId id="265" r:id="rId11"/>
   </p:sldIdLst>
   <p:notesMasterIdLst>
-    <p:notesMasterId r:id="rId12"/>
+    <p:notesMasterId r:id="rId11"/>
   </p:notesMasterIdLst>
   <p:sldSz cx="12192000" cy="6858000"/>
   <p:notesSz cx="6858000" cy="12192000"/>
@@ -553,94 +552,6 @@
 </p:notes>
 </file>
 
-<file path=ppt/notesSlides/notesSlide10.xml><?xml version="1.0" encoding="utf-8"?>
-<p:notes xmlns:a="http://schemas.openxmlformats.org/drawingml/2006/main" xmlns:r="http://schemas.openxmlformats.org/officeDocument/2006/relationships" xmlns:p="http://schemas.openxmlformats.org/presentationml/2006/main">
-  <p:cSld>
-    <p:spTree>
-      <p:nvGrpSpPr>
-        <p:cNvPr id="1" name=""/>
-        <p:cNvGrpSpPr/>
-        <p:nvPr/>
-      </p:nvGrpSpPr>
-      <p:grpSpPr>
-        <a:xfrm>
-          <a:off x="0" y="0"/>
-          <a:ext cx="0" cy="0"/>
-          <a:chOff x="0" y="0"/>
-          <a:chExt cx="0" cy="0"/>
-        </a:xfrm>
-      </p:grpSpPr>
-      <p:sp>
-        <p:nvSpPr>
-          <p:cNvPr id="2" name="Slide Image Placeholder 1"/>
-          <p:cNvSpPr>
-            <a:spLocks noGrp="1" noRot="1" noChangeAspect="1"/>
-          </p:cNvSpPr>
-          <p:nvPr>
-            <p:ph type="sldImg"/>
-          </p:nvPr>
-        </p:nvSpPr>
-        <p:spPr/>
-      </p:sp>
-      <p:sp>
-        <p:nvSpPr>
-          <p:cNvPr id="3" name="Notes Placeholder 2"/>
-          <p:cNvSpPr>
-            <a:spLocks noGrp="1"/>
-          </p:cNvSpPr>
-          <p:nvPr>
-            <p:ph type="body" idx="1"/>
-          </p:nvPr>
-        </p:nvSpPr>
-        <p:spPr/>
-        <p:txBody>
-          <a:bodyPr/>
-          <a:lstStyle/>
-          <a:p>
-            <a:r>
-              <a:rPr lang="en-US" dirty="0"/>
-              <a:t>اتركي الشريحة معروضة أثناء الأسئلة. وقبل الإغلاق كرري العرض الوحيد المطلوب: تجربة أسبوع على لائحة واحدة، تجهيزها علينا بالكامل.</a:t>
-            </a:r>
-            <a:endParaRPr lang="en-US" dirty="0"/>
-          </a:p>
-        </p:txBody>
-      </p:sp>
-      <p:sp>
-        <p:nvSpPr>
-          <p:cNvPr id="4" name="Slide Number Placeholder 3"/>
-          <p:cNvSpPr>
-            <a:spLocks noGrp="1"/>
-          </p:cNvSpPr>
-          <p:nvPr>
-            <p:ph type="sldNum" sz="quarter" idx="10"/>
-          </p:nvPr>
-        </p:nvSpPr>
-        <p:spPr/>
-        <p:txBody>
-          <a:bodyPr/>
-          <a:lstStyle/>
-          <a:p>
-            <a:fld id="{F7021451-1387-4CA6-816F-3879F97B5CBC}" type="slidenum">
-              <a:rPr lang="en-US"/>
-              <a:t>10</a:t>
-            </a:fld>
-            <a:endParaRPr lang="en-US"/>
-          </a:p>
-        </p:txBody>
-      </p:sp>
-    </p:spTree>
-    <p:extLst>
-      <p:ext uri="{BB962C8B-B14F-4D97-AF65-F5344CB8AC3E}">
-        <p14:creationId xmlns:p14="http://schemas.microsoft.com/office/powerpoint/2010/main" val="1024086991"/>
-      </p:ext>
-    </p:extLst>
-  </p:cSld>
-  <p:clrMapOvr>
-    <a:masterClrMapping/>
-  </p:clrMapOvr>
-</p:notes>
-</file>
-
 <file path=ppt/notesSlides/notesSlide2.xml><?xml version="1.0" encoding="utf-8"?>
 <p:notes xmlns:a="http://schemas.openxmlformats.org/drawingml/2006/main" xmlns:r="http://schemas.openxmlformats.org/officeDocument/2006/relationships" xmlns:p="http://schemas.openxmlformats.org/presentationml/2006/main">
   <p:cSld>
@@ -1039,7 +950,7 @@
           <a:p>
             <a:r>
               <a:rPr lang="en-US" dirty="0"/>
-              <a:t>هذه الشريحة لمدير التقنية وأمن المعلومات — الشخص الذي يستطيع الرفض. النقطة الجوهرية: العزل مفروض داخل قاعدة البيانات نفسها فلا يكسره خطأ برمجي، ومُثبَت باختبارات نعرضها عند الطلب. وإن سُئلتِ عن شهادات SOC 2 / ISO: بصراحة — لا نحملها بعد، ونعرض بدلها تقرير الاختبارات.</a:t>
+              <a:t>هذه لحظة البيع الحقيقية. اطلبي منهم لائحة قبل الاجتماع بيوم وجهّزيها، ودعيهم يكتبون السؤال بأيديهم. وإن سأل مسؤول التقنية عن الأمان: العزل بين الشركات مفروض داخل قاعدة البيانات نفسها ومُثبَت بأكثر من مئتي اختبار، ونرسل التقرير التقني الكامل لمن يطلبه — جواب دقيقة واحدة، ولا شريحة له.</a:t>
             </a:r>
             <a:endParaRPr lang="en-US" dirty="0"/>
           </a:p>
@@ -1127,7 +1038,7 @@
           <a:p>
             <a:r>
               <a:rPr lang="en-US" dirty="0"/>
-              <a:t>هذه لحظة البيع الحقيقية. اطلبي منهم لائحة قبل الاجتماع بيوم وجهّزيها. ودعيهم يكتبون السؤال بأيديهم. شجّعيهم على سؤالٍ لا جواب له في الملف — حين يقول «لم أجد» بدل الاختراع، تكسبين ثقة مدير التقنية أكثر من أي شريحة.</a:t>
+              <a:t>لا تفاوضي على السعر في الاجتماع الأول — الهدف الوحيد هو بدء التجربة. وإن سُئلتِ عن السعر قولي الأرقام بثقة: أقل من راتب متدرّب، مقابل استرجاع وقت أغلى موظفيكم.</a:t>
             </a:r>
             <a:endParaRPr lang="en-US" dirty="0"/>
           </a:p>
@@ -1215,7 +1126,7 @@
           <a:p>
             <a:r>
               <a:rPr lang="en-US" dirty="0"/>
-              <a:t>لا تفاوضي على السعر في الاجتماع الأول — الهدف الوحيد هو بدء التجربة. وإن سُئلتِ عن السعر قولي الأرقام بثقة: أقل من راتب متدرّب، مقابل استرجاع وقت أغلى موظفيكم.</a:t>
+              <a:t>أنهي الاجتماع بسؤال مباشر: «أي لائحة نبدأ بها؟» — سؤال يفترض الموافقة ويجعل الخطوة التالية ملموسة. واتفقي على موعد مراجعة نهاية الأسبوع قبل مغادرة الاجتماع.</a:t>
             </a:r>
             <a:endParaRPr lang="en-US" dirty="0"/>
           </a:p>
@@ -1303,7 +1214,7 @@
           <a:p>
             <a:r>
               <a:rPr lang="en-US" dirty="0"/>
-              <a:t>أنهي الاجتماع بسؤال مباشر: «أي لائحة نبدأ بها؟» — سؤال يفترض الموافقة ويجعل الخطوة التالية ملموسة. واتفقي على موعد مراجعة نهاية الأسبوع قبل مغادرة الاجتماع.</a:t>
+              <a:t>اتركي الشريحة معروضة أثناء الأسئلة. وقبل الإغلاق كرري العرض الوحيد المطلوب: تجربة أسبوع على لائحة واحدة، تجهيزها علينا بالكامل.</a:t>
             </a:r>
             <a:endParaRPr lang="en-US" dirty="0"/>
           </a:p>
@@ -1760,7 +1671,7 @@
               <a:buNone/>
             </a:pPr>
             <a:r>
-              <a:rPr lang="ar-SA" altLang="en-US" sz="5400" b="1" dirty="0">
+              <a:rPr lang="ar-SA" altLang="en-US" sz="4400" b="1" dirty="0">
                 <a:solidFill>
                   <a:srgbClr val="FFFFFF"/>
                 </a:solidFill>
@@ -1768,9 +1679,9 @@
                 <a:ea typeface="Arial" pitchFamily="34" charset="-122"/>
                 <a:cs typeface="Arial" pitchFamily="34" charset="-120"/>
               </a:rPr>
-              <a:t>اسألوا مستنداتكم.</a:t>
-            </a:r>
-            <a:endParaRPr lang="ar-SA" sz="5400" dirty="0"/>
+              <a:t>موظفوكم يسألون — مستنداتكم تجيب.</a:t>
+            </a:r>
+            <a:endParaRPr lang="ar-SA" sz="4400" dirty="0"/>
           </a:p>
         </p:txBody>
       </p:sp>
@@ -1810,7 +1721,7 @@
                 <a:ea typeface="Arial" pitchFamily="34" charset="-122"/>
                 <a:cs typeface="Arial" pitchFamily="34" charset="-120"/>
               </a:rPr>
-              <a:t>مساعد ذكيّ يجيب موظفيكم من وثائق شركتكم وحدها — بالعربية،</a:t>
+              <a:t>استرجعوا وقت أغلى موظفيكم: جوابٌ فوري بالعربية من وثائق شركتكم،</a:t>
             </a:r>
             <a:endParaRPr lang="ar-SA" sz="1900" dirty="0"/>
           </a:p>
@@ -1830,7 +1741,7 @@
                 <a:ea typeface="Arial" pitchFamily="34" charset="-122"/>
                 <a:cs typeface="Arial" pitchFamily="34" charset="-120"/>
               </a:rPr>
-              <a:t>مع ذكر المستند والصفحة، والتحقق من كل رقم قبل أن يصلكم.</a:t>
+              <a:t>ومعه المستند والصفحة — فلا أحد يقاطع خبيرًا ليسأله ما هو مكتوب.</a:t>
             </a:r>
             <a:endParaRPr lang="ar-SA" sz="1900" dirty="0"/>
           </a:p>
@@ -2026,262 +1937,6 @@
               <a:t>نظام العمل · صفحة ٢٥ · ثقة عالية</a:t>
             </a:r>
             <a:endParaRPr lang="ar-SA" sz="1150" dirty="0"/>
-          </a:p>
-        </p:txBody>
-      </p:sp>
-    </p:spTree>
-  </p:cSld>
-  <p:clrMapOvr>
-    <a:masterClrMapping/>
-  </p:clrMapOvr>
-</p:sld>
-</file>
-
-<file path=ppt/slides/slide10.xml><?xml version="1.0" encoding="utf-8"?>
-<p:sld xmlns:a="http://schemas.openxmlformats.org/drawingml/2006/main" xmlns:r="http://schemas.openxmlformats.org/officeDocument/2006/relationships" xmlns:p="http://schemas.openxmlformats.org/presentationml/2006/main">
-  <p:cSld name="Slide 10">
-    <p:bg>
-      <p:bgPr>
-        <a:solidFill>
-          <a:srgbClr val="132A3E"/>
-        </a:solidFill>
-      </p:bgPr>
-    </p:bg>
-    <p:spTree>
-      <p:nvGrpSpPr>
-        <p:cNvPr id="1" name=""/>
-        <p:cNvGrpSpPr/>
-        <p:nvPr/>
-      </p:nvGrpSpPr>
-      <p:grpSpPr>
-        <a:xfrm>
-          <a:off x="0" y="0"/>
-          <a:ext cx="0" cy="0"/>
-          <a:chOff x="0" y="0"/>
-          <a:chExt cx="0" cy="0"/>
-        </a:xfrm>
-      </p:grpSpPr>
-      <p:sp>
-        <p:nvSpPr>
-          <p:cNvPr id="2" name="Shape 0"/>
-          <p:cNvSpPr/>
-          <p:nvPr/>
-        </p:nvSpPr>
-        <p:spPr>
-          <a:xfrm>
-            <a:off x="0" y="0"/>
-            <a:ext cx="12188952" cy="6858000"/>
-          </a:xfrm>
-          <a:prstGeom prst="rect">
-            <a:avLst/>
-          </a:prstGeom>
-          <a:solidFill>
-            <a:srgbClr val="0E2030"/>
-          </a:solidFill>
-          <a:ln/>
-        </p:spPr>
-      </p:sp>
-      <p:sp>
-        <p:nvSpPr>
-          <p:cNvPr id="3" name="Text 1"/>
-          <p:cNvSpPr txBox="1"/>
-          <p:nvPr/>
-        </p:nvSpPr>
-        <p:spPr>
-          <a:xfrm>
-            <a:off x="822960" y="2103120"/>
-            <a:ext cx="10543032" cy="914400"/>
-          </a:xfrm>
-          <a:prstGeom prst="rect">
-            <a:avLst/>
-          </a:prstGeom>
-          <a:noFill/>
-          <a:ln/>
-        </p:spPr>
-        <p:txBody>
-          <a:bodyPr wrap="square" lIns="0" tIns="0" rIns="0" bIns="0" rtlCol="0" anchor="ctr"/>
-          <a:lstStyle/>
-          <a:p>
-            <a:pPr rtl="1" algn="r" indent="0" marL="0">
-              <a:buNone/>
-            </a:pPr>
-            <a:r>
-              <a:rPr lang="ar-SA" altLang="en-US" sz="4400" b="1" dirty="0">
-                <a:solidFill>
-                  <a:srgbClr val="FFFFFF"/>
-                </a:solidFill>
-                <a:latin typeface="Arial" pitchFamily="34" charset="0"/>
-                <a:ea typeface="Arial" pitchFamily="34" charset="-122"/>
-                <a:cs typeface="Arial" pitchFamily="34" charset="-120"/>
-              </a:rPr>
-              <a:t>أجيبوا مرة واحدة —</a:t>
-            </a:r>
-            <a:endParaRPr lang="ar-SA" sz="4400" dirty="0"/>
-          </a:p>
-        </p:txBody>
-      </p:sp>
-      <p:sp>
-        <p:nvSpPr>
-          <p:cNvPr id="4" name="Text 2"/>
-          <p:cNvSpPr txBox="1"/>
-          <p:nvPr/>
-        </p:nvSpPr>
-        <p:spPr>
-          <a:xfrm>
-            <a:off x="822960" y="3063240"/>
-            <a:ext cx="10543032" cy="914400"/>
-          </a:xfrm>
-          <a:prstGeom prst="rect">
-            <a:avLst/>
-          </a:prstGeom>
-          <a:noFill/>
-          <a:ln/>
-        </p:spPr>
-        <p:txBody>
-          <a:bodyPr wrap="square" lIns="0" tIns="0" rIns="0" bIns="0" rtlCol="0" anchor="ctr"/>
-          <a:lstStyle/>
-          <a:p>
-            <a:pPr rtl="1" algn="r" indent="0" marL="0">
-              <a:buNone/>
-            </a:pPr>
-            <a:r>
-              <a:rPr lang="ar-SA" altLang="en-US" sz="4400" b="1" dirty="0">
-                <a:solidFill>
-                  <a:srgbClr val="C9A227"/>
-                </a:solidFill>
-                <a:latin typeface="Arial" pitchFamily="34" charset="0"/>
-                <a:ea typeface="Arial" pitchFamily="34" charset="-122"/>
-                <a:cs typeface="Arial" pitchFamily="34" charset="-120"/>
-              </a:rPr>
-              <a:t>والنظام يجيب بعدكم.</a:t>
-            </a:r>
-            <a:endParaRPr lang="ar-SA" sz="4400" dirty="0"/>
-          </a:p>
-        </p:txBody>
-      </p:sp>
-      <p:pic>
-        <p:nvPicPr>
-          <p:cNvPr id="5" name="Image 0" descr="preencoded.png">    </p:cNvPr>
-          <p:cNvPicPr>
-            <a:picLocks noChangeAspect="1"/>
-          </p:cNvPicPr>
-          <p:nvPr/>
-        </p:nvPicPr>
-        <p:blipFill>
-          <a:blip r:embed="rId1"/>
-          <a:stretch>
-            <a:fillRect/>
-          </a:stretch>
-        </p:blipFill>
-        <p:spPr>
-          <a:xfrm>
-            <a:off x="11045952" y="4709160"/>
-            <a:ext cx="292608" cy="292608"/>
-          </a:xfrm>
-          <a:prstGeom prst="rect">
-            <a:avLst/>
-          </a:prstGeom>
-        </p:spPr>
-      </p:pic>
-      <p:sp>
-        <p:nvSpPr>
-          <p:cNvPr id="6" name="Text 3"/>
-          <p:cNvSpPr txBox="1"/>
-          <p:nvPr/>
-        </p:nvSpPr>
-        <p:spPr>
-          <a:xfrm>
-            <a:off x="822960" y="4645152"/>
-            <a:ext cx="10040112" cy="457200"/>
-          </a:xfrm>
-          <a:prstGeom prst="rect">
-            <a:avLst/>
-          </a:prstGeom>
-          <a:noFill/>
-          <a:ln/>
-        </p:spPr>
-        <p:txBody>
-          <a:bodyPr wrap="square" lIns="0" tIns="0" rIns="0" bIns="0" rtlCol="0" anchor="ctr"/>
-          <a:lstStyle/>
-          <a:p>
-            <a:pPr rtl="1" algn="r" indent="0" marL="0">
-              <a:buNone/>
-            </a:pPr>
-            <a:r>
-              <a:rPr lang="ar-SA" altLang="en-US" sz="1600" dirty="0">
-                <a:solidFill>
-                  <a:srgbClr val="E8F0F7"/>
-                </a:solidFill>
-                <a:latin typeface="Arial" pitchFamily="34" charset="0"/>
-                <a:ea typeface="Arial" pitchFamily="34" charset="-122"/>
-                <a:cs typeface="Arial" pitchFamily="34" charset="-120"/>
-              </a:rPr>
-              <a:t>ma3rifah-ai.vercel.app</a:t>
-            </a:r>
-            <a:endParaRPr lang="ar-SA" sz="1600" dirty="0"/>
-          </a:p>
-        </p:txBody>
-      </p:sp>
-      <p:pic>
-        <p:nvPicPr>
-          <p:cNvPr id="7" name="Image 1" descr="preencoded.png">    </p:cNvPr>
-          <p:cNvPicPr>
-            <a:picLocks noChangeAspect="1"/>
-          </p:cNvPicPr>
-          <p:nvPr/>
-        </p:nvPicPr>
-        <p:blipFill>
-          <a:blip r:embed="rId2"/>
-          <a:stretch>
-            <a:fillRect/>
-          </a:stretch>
-        </p:blipFill>
-        <p:spPr>
-          <a:xfrm>
-            <a:off x="11045952" y="5257800"/>
-            <a:ext cx="292608" cy="292608"/>
-          </a:xfrm>
-          <a:prstGeom prst="rect">
-            <a:avLst/>
-          </a:prstGeom>
-        </p:spPr>
-      </p:pic>
-      <p:sp>
-        <p:nvSpPr>
-          <p:cNvPr id="8" name="Text 4"/>
-          <p:cNvSpPr txBox="1"/>
-          <p:nvPr/>
-        </p:nvSpPr>
-        <p:spPr>
-          <a:xfrm>
-            <a:off x="822960" y="5193792"/>
-            <a:ext cx="10040112" cy="457200"/>
-          </a:xfrm>
-          <a:prstGeom prst="rect">
-            <a:avLst/>
-          </a:prstGeom>
-          <a:noFill/>
-          <a:ln/>
-        </p:spPr>
-        <p:txBody>
-          <a:bodyPr wrap="square" lIns="0" tIns="0" rIns="0" bIns="0" rtlCol="0" anchor="ctr"/>
-          <a:lstStyle/>
-          <a:p>
-            <a:pPr rtl="1" algn="r" indent="0" marL="0">
-              <a:buNone/>
-            </a:pPr>
-            <a:r>
-              <a:rPr lang="ar-SA" altLang="en-US" sz="1600" dirty="0">
-                <a:solidFill>
-                  <a:srgbClr val="E8F0F7"/>
-                </a:solidFill>
-                <a:latin typeface="Arial" pitchFamily="34" charset="0"/>
-                <a:ea typeface="Arial" pitchFamily="34" charset="-122"/>
-                <a:cs typeface="Arial" pitchFamily="34" charset="-120"/>
-              </a:rPr>
-              <a:t>manal.alareqi@gmail.com</a:t>
-            </a:r>
-            <a:endParaRPr lang="ar-SA" sz="1600" dirty="0"/>
           </a:p>
         </p:txBody>
       </p:sp>
@@ -2350,7 +2005,7 @@
                 <a:ea typeface="Arial" pitchFamily="34" charset="-122"/>
                 <a:cs typeface="Arial" pitchFamily="34" charset="-120"/>
               </a:rPr>
-              <a:t>المعرفة موجودة — والوصول إليها يمرّ بإنسان مشغول</a:t>
+              <a:t>كم مرة أجبتم السؤال نفسه هذا الشهر؟</a:t>
             </a:r>
             <a:endParaRPr lang="ar-SA" sz="3200" dirty="0"/>
           </a:p>
@@ -2977,7 +2632,7 @@
                 <a:ea typeface="Arial" pitchFamily="34" charset="-122"/>
                 <a:cs typeface="Arial" pitchFamily="34" charset="-120"/>
               </a:rPr>
-              <a:t>والبديل الواقعي اليوم: الموظف يسأل ChatGPT ويلصق فيه مستندًا داخليًا — بلا إذن وبلا رقابة.</a:t>
+              <a:t>وحين لا تعطونهم بديلًا آمنًا — يفتحون ChatGPT ويلصقون مستنداتكم فيه.</a:t>
             </a:r>
             <a:endParaRPr lang="ar-SA" sz="1500" dirty="0"/>
           </a:p>
@@ -3048,7 +2703,7 @@
                 <a:ea typeface="Arial" pitchFamily="34" charset="-122"/>
                 <a:cs typeface="Arial" pitchFamily="34" charset="-120"/>
               </a:rPr>
-              <a:t>أربع خطوات — والتجهيز بالساعات لا بالأشهر</a:t>
+              <a:t>ثلاث خطوات تفصلكم عن أول جواب</a:t>
             </a:r>
             <a:endParaRPr lang="ar-SA" sz="3200" dirty="0"/>
           </a:p>
@@ -3062,12 +2717,12 @@
         </p:nvSpPr>
         <p:spPr>
           <a:xfrm>
-            <a:off x="8942832" y="1783080"/>
-            <a:ext cx="2606040" cy="3108960"/>
+            <a:off x="8028432" y="1783080"/>
+            <a:ext cx="3520440" cy="3108960"/>
           </a:xfrm>
           <a:prstGeom prst="roundRect">
             <a:avLst>
-              <a:gd name="adj" fmla="val 4211"/>
+              <a:gd name="adj" fmla="val 3529"/>
             </a:avLst>
           </a:prstGeom>
           <a:solidFill>
@@ -3143,8 +2798,8 @@
         </p:nvSpPr>
         <p:spPr>
           <a:xfrm>
-            <a:off x="9171432" y="2880360"/>
-            <a:ext cx="2148840" cy="502920"/>
+            <a:off x="8257032" y="2880360"/>
+            <a:ext cx="3063240" cy="502920"/>
           </a:xfrm>
           <a:prstGeom prst="rect">
             <a:avLst/>
@@ -3168,7 +2823,7 @@
                 <a:ea typeface="Arial" pitchFamily="34" charset="-122"/>
                 <a:cs typeface="Arial" pitchFamily="34" charset="-120"/>
               </a:rPr>
-              <a:t>ارفعوا المستندات</a:t>
+              <a:t>ارفعوا ملفاتكم</a:t>
             </a:r>
             <a:endParaRPr lang="ar-SA" sz="1650" dirty="0"/>
           </a:p>
@@ -3182,8 +2837,8 @@
         </p:nvSpPr>
         <p:spPr>
           <a:xfrm>
-            <a:off x="9171432" y="3401568"/>
-            <a:ext cx="2148840" cy="1325880"/>
+            <a:off x="8257032" y="3401568"/>
+            <a:ext cx="3063240" cy="1325880"/>
           </a:xfrm>
           <a:prstGeom prst="rect">
             <a:avLst/>
@@ -3224,12 +2879,12 @@
         </p:nvSpPr>
         <p:spPr>
           <a:xfrm>
-            <a:off x="6044184" y="1783080"/>
-            <a:ext cx="2606040" cy="3108960"/>
+            <a:off x="4187952" y="1783080"/>
+            <a:ext cx="3520440" cy="3108960"/>
           </a:xfrm>
           <a:prstGeom prst="roundRect">
             <a:avLst>
-              <a:gd name="adj" fmla="val 4211"/>
+              <a:gd name="adj" fmla="val 3529"/>
             </a:avLst>
           </a:prstGeom>
           <a:solidFill>
@@ -3246,7 +2901,7 @@
         </p:nvSpPr>
         <p:spPr>
           <a:xfrm>
-            <a:off x="7735824" y="2057400"/>
+            <a:off x="6793992" y="2057400"/>
             <a:ext cx="640080" cy="640080"/>
           </a:xfrm>
           <a:prstGeom prst="ellipse">
@@ -3266,7 +2921,7 @@
         </p:nvSpPr>
         <p:spPr>
           <a:xfrm>
-            <a:off x="7735824" y="2057400"/>
+            <a:off x="6793992" y="2057400"/>
             <a:ext cx="640080" cy="640080"/>
           </a:xfrm>
           <a:prstGeom prst="rect">
@@ -3305,8 +2960,8 @@
         </p:nvSpPr>
         <p:spPr>
           <a:xfrm>
-            <a:off x="6272784" y="2880360"/>
-            <a:ext cx="2148840" cy="502920"/>
+            <a:off x="4416552" y="2880360"/>
+            <a:ext cx="3063240" cy="502920"/>
           </a:xfrm>
           <a:prstGeom prst="rect">
             <a:avLst/>
@@ -3330,7 +2985,7 @@
                 <a:ea typeface="Arial" pitchFamily="34" charset="-122"/>
                 <a:cs typeface="Arial" pitchFamily="34" charset="-120"/>
               </a:rPr>
-              <a:t>تُقرأ وتُفهرس</a:t>
+              <a:t>اسألوا بالعربية</a:t>
             </a:r>
             <a:endParaRPr lang="ar-SA" sz="1650" dirty="0"/>
           </a:p>
@@ -3344,8 +2999,8 @@
         </p:nvSpPr>
         <p:spPr>
           <a:xfrm>
-            <a:off x="6272784" y="3401568"/>
-            <a:ext cx="2148840" cy="1325880"/>
+            <a:off x="4416552" y="3401568"/>
+            <a:ext cx="3063240" cy="1325880"/>
           </a:xfrm>
           <a:prstGeom prst="rect">
             <a:avLst/>
@@ -3372,7 +3027,7 @@
                 <a:ea typeface="Arial" pitchFamily="34" charset="-122"/>
                 <a:cs typeface="Arial" pitchFamily="34" charset="-120"/>
               </a:rPr>
-              <a:t>معالجة مخصّصة للعربية، وبحث بالمعنى وباللفظ معًا.</a:t>
+              <a:t>كلٌّ بلغته وصياغته — من المتصفح أو من واتساب.</a:t>
             </a:r>
             <a:endParaRPr lang="ar-SA" sz="1250" dirty="0"/>
           </a:p>
@@ -3386,33 +3041,13 @@
         </p:nvSpPr>
         <p:spPr>
           <a:xfrm>
-            <a:off x="3145536" y="1783080"/>
-            <a:ext cx="2606040" cy="3108960"/>
+            <a:off x="347472" y="1783080"/>
+            <a:ext cx="3520440" cy="3108960"/>
           </a:xfrm>
           <a:prstGeom prst="roundRect">
             <a:avLst>
-              <a:gd name="adj" fmla="val 4211"/>
+              <a:gd name="adj" fmla="val 3529"/>
             </a:avLst>
-          </a:prstGeom>
-          <a:solidFill>
-            <a:srgbClr val="EDF3F8"/>
-          </a:solidFill>
-          <a:ln/>
-        </p:spPr>
-      </p:sp>
-      <p:sp>
-        <p:nvSpPr>
-          <p:cNvPr id="14" name="Shape 12"/>
-          <p:cNvSpPr/>
-          <p:nvPr/>
-        </p:nvSpPr>
-        <p:spPr>
-          <a:xfrm>
-            <a:off x="4837176" y="2057400"/>
-            <a:ext cx="640080" cy="640080"/>
-          </a:xfrm>
-          <a:prstGeom prst="ellipse">
-            <a:avLst/>
           </a:prstGeom>
           <a:solidFill>
             <a:srgbClr val="2A6C9E"/>
@@ -3422,13 +3057,33 @@
       </p:sp>
       <p:sp>
         <p:nvSpPr>
+          <p:cNvPr id="14" name="Shape 12"/>
+          <p:cNvSpPr/>
+          <p:nvPr/>
+        </p:nvSpPr>
+        <p:spPr>
+          <a:xfrm>
+            <a:off x="2953512" y="2057400"/>
+            <a:ext cx="640080" cy="640080"/>
+          </a:xfrm>
+          <a:prstGeom prst="ellipse">
+            <a:avLst/>
+          </a:prstGeom>
+          <a:solidFill>
+            <a:srgbClr val="FFFFFF"/>
+          </a:solidFill>
+          <a:ln/>
+        </p:spPr>
+      </p:sp>
+      <p:sp>
+        <p:nvSpPr>
           <p:cNvPr id="15" name="Text 13"/>
           <p:cNvSpPr txBox="1"/>
           <p:nvPr/>
         </p:nvSpPr>
         <p:spPr>
           <a:xfrm>
-            <a:off x="4837176" y="2057400"/>
+            <a:off x="2953512" y="2057400"/>
             <a:ext cx="640080" cy="640080"/>
           </a:xfrm>
           <a:prstGeom prst="rect">
@@ -3447,52 +3102,52 @@
             <a:r>
               <a:rPr lang="ar-SA" altLang="en-US" sz="2000" b="1" dirty="0">
                 <a:solidFill>
+                  <a:srgbClr val="2A6C9E"/>
+                </a:solidFill>
+                <a:latin typeface="Arial" pitchFamily="34" charset="0"/>
+                <a:ea typeface="Arial" pitchFamily="34" charset="-122"/>
+                <a:cs typeface="Arial" pitchFamily="34" charset="-120"/>
+              </a:rPr>
+              <a:t>٣</a:t>
+            </a:r>
+            <a:endParaRPr lang="ar-SA" sz="2000" dirty="0"/>
+          </a:p>
+        </p:txBody>
+      </p:sp>
+      <p:sp>
+        <p:nvSpPr>
+          <p:cNvPr id="16" name="Text 14"/>
+          <p:cNvSpPr txBox="1"/>
+          <p:nvPr/>
+        </p:nvSpPr>
+        <p:spPr>
+          <a:xfrm>
+            <a:off x="576072" y="2880360"/>
+            <a:ext cx="3063240" cy="502920"/>
+          </a:xfrm>
+          <a:prstGeom prst="rect">
+            <a:avLst/>
+          </a:prstGeom>
+          <a:noFill/>
+          <a:ln/>
+        </p:spPr>
+        <p:txBody>
+          <a:bodyPr wrap="square" lIns="0" tIns="0" rIns="0" bIns="0" rtlCol="0" anchor="ctr"/>
+          <a:lstStyle/>
+          <a:p>
+            <a:pPr rtl="1" algn="r" indent="0" marL="0">
+              <a:buNone/>
+            </a:pPr>
+            <a:r>
+              <a:rPr lang="ar-SA" altLang="en-US" sz="1650" b="1" dirty="0">
+                <a:solidFill>
                   <a:srgbClr val="FFFFFF"/>
                 </a:solidFill>
                 <a:latin typeface="Arial" pitchFamily="34" charset="0"/>
                 <a:ea typeface="Arial" pitchFamily="34" charset="-122"/>
                 <a:cs typeface="Arial" pitchFamily="34" charset="-120"/>
               </a:rPr>
-              <a:t>٣</a:t>
-            </a:r>
-            <a:endParaRPr lang="ar-SA" sz="2000" dirty="0"/>
-          </a:p>
-        </p:txBody>
-      </p:sp>
-      <p:sp>
-        <p:nvSpPr>
-          <p:cNvPr id="16" name="Text 14"/>
-          <p:cNvSpPr txBox="1"/>
-          <p:nvPr/>
-        </p:nvSpPr>
-        <p:spPr>
-          <a:xfrm>
-            <a:off x="3374136" y="2880360"/>
-            <a:ext cx="2148840" cy="502920"/>
-          </a:xfrm>
-          <a:prstGeom prst="rect">
-            <a:avLst/>
-          </a:prstGeom>
-          <a:noFill/>
-          <a:ln/>
-        </p:spPr>
-        <p:txBody>
-          <a:bodyPr wrap="square" lIns="0" tIns="0" rIns="0" bIns="0" rtlCol="0" anchor="ctr"/>
-          <a:lstStyle/>
-          <a:p>
-            <a:pPr rtl="1" algn="r" indent="0" marL="0">
-              <a:buNone/>
-            </a:pPr>
-            <a:r>
-              <a:rPr lang="ar-SA" altLang="en-US" sz="1650" b="1" dirty="0">
-                <a:solidFill>
-                  <a:srgbClr val="1A2B3A"/>
-                </a:solidFill>
-                <a:latin typeface="Arial" pitchFamily="34" charset="0"/>
-                <a:ea typeface="Arial" pitchFamily="34" charset="-122"/>
-                <a:cs typeface="Arial" pitchFamily="34" charset="-120"/>
-              </a:rPr>
-              <a:t>يسأل الموظف</a:t>
+              <a:t>استلموا الجواب بمصدره</a:t>
             </a:r>
             <a:endParaRPr lang="ar-SA" sz="1650" dirty="0"/>
           </a:p>
@@ -3506,8 +3161,8 @@
         </p:nvSpPr>
         <p:spPr>
           <a:xfrm>
-            <a:off x="3374136" y="3401568"/>
-            <a:ext cx="2148840" cy="1325880"/>
+            <a:off x="576072" y="3401568"/>
+            <a:ext cx="3063240" cy="1325880"/>
           </a:xfrm>
           <a:prstGeom prst="rect">
             <a:avLst/>
@@ -3528,13 +3183,13 @@
             <a:r>
               <a:rPr lang="ar-SA" altLang="en-US" sz="1250" dirty="0">
                 <a:solidFill>
-                  <a:srgbClr val="5B6B7A"/>
-                </a:solidFill>
-                <a:latin typeface="Arial" pitchFamily="34" charset="0"/>
-                <a:ea typeface="Arial" pitchFamily="34" charset="-122"/>
-                <a:cs typeface="Arial" pitchFamily="34" charset="-120"/>
-              </a:rPr>
-              <a:t>بلغته الطبيعية — من المتصفح أو من واتساب.</a:t>
+                  <a:srgbClr val="E8F0F7"/>
+                </a:solidFill>
+                <a:latin typeface="Arial" pitchFamily="34" charset="0"/>
+                <a:ea typeface="Arial" pitchFamily="34" charset="-122"/>
+                <a:cs typeface="Arial" pitchFamily="34" charset="-120"/>
+              </a:rPr>
+              <a:t>المستند والصفحة مع كل إجابة — تراجعونها بأنفسكم في ثوانٍ.</a:t>
             </a:r>
             <a:endParaRPr lang="ar-SA" sz="1250" dirty="0"/>
           </a:p>
@@ -3542,169 +3197,7 @@
       </p:sp>
       <p:sp>
         <p:nvSpPr>
-          <p:cNvPr id="18" name="Shape 16"/>
-          <p:cNvSpPr/>
-          <p:nvPr/>
-        </p:nvSpPr>
-        <p:spPr>
-          <a:xfrm>
-            <a:off x="246888" y="1783080"/>
-            <a:ext cx="2606040" cy="3108960"/>
-          </a:xfrm>
-          <a:prstGeom prst="roundRect">
-            <a:avLst>
-              <a:gd name="adj" fmla="val 4211"/>
-            </a:avLst>
-          </a:prstGeom>
-          <a:solidFill>
-            <a:srgbClr val="2A6C9E"/>
-          </a:solidFill>
-          <a:ln/>
-        </p:spPr>
-      </p:sp>
-      <p:sp>
-        <p:nvSpPr>
-          <p:cNvPr id="19" name="Shape 17"/>
-          <p:cNvSpPr/>
-          <p:nvPr/>
-        </p:nvSpPr>
-        <p:spPr>
-          <a:xfrm>
-            <a:off x="1938528" y="2057400"/>
-            <a:ext cx="640080" cy="640080"/>
-          </a:xfrm>
-          <a:prstGeom prst="ellipse">
-            <a:avLst/>
-          </a:prstGeom>
-          <a:solidFill>
-            <a:srgbClr val="FFFFFF"/>
-          </a:solidFill>
-          <a:ln/>
-        </p:spPr>
-      </p:sp>
-      <p:sp>
-        <p:nvSpPr>
-          <p:cNvPr id="20" name="Text 18"/>
-          <p:cNvSpPr txBox="1"/>
-          <p:nvPr/>
-        </p:nvSpPr>
-        <p:spPr>
-          <a:xfrm>
-            <a:off x="1938528" y="2057400"/>
-            <a:ext cx="640080" cy="640080"/>
-          </a:xfrm>
-          <a:prstGeom prst="rect">
-            <a:avLst/>
-          </a:prstGeom>
-          <a:noFill/>
-          <a:ln/>
-        </p:spPr>
-        <p:txBody>
-          <a:bodyPr wrap="square" lIns="0" tIns="0" rIns="0" bIns="0" rtlCol="0" anchor="ctr"/>
-          <a:lstStyle/>
-          <a:p>
-            <a:pPr rtl="1" algn="ctr" indent="0" marL="0">
-              <a:buNone/>
-            </a:pPr>
-            <a:r>
-              <a:rPr lang="ar-SA" altLang="en-US" sz="2000" b="1" dirty="0">
-                <a:solidFill>
-                  <a:srgbClr val="2A6C9E"/>
-                </a:solidFill>
-                <a:latin typeface="Arial" pitchFamily="34" charset="0"/>
-                <a:ea typeface="Arial" pitchFamily="34" charset="-122"/>
-                <a:cs typeface="Arial" pitchFamily="34" charset="-120"/>
-              </a:rPr>
-              <a:t>٤</a:t>
-            </a:r>
-            <a:endParaRPr lang="ar-SA" sz="2000" dirty="0"/>
-          </a:p>
-        </p:txBody>
-      </p:sp>
-      <p:sp>
-        <p:nvSpPr>
-          <p:cNvPr id="21" name="Text 19"/>
-          <p:cNvSpPr txBox="1"/>
-          <p:nvPr/>
-        </p:nvSpPr>
-        <p:spPr>
-          <a:xfrm>
-            <a:off x="475488" y="2880360"/>
-            <a:ext cx="2148840" cy="502920"/>
-          </a:xfrm>
-          <a:prstGeom prst="rect">
-            <a:avLst/>
-          </a:prstGeom>
-          <a:noFill/>
-          <a:ln/>
-        </p:spPr>
-        <p:txBody>
-          <a:bodyPr wrap="square" lIns="0" tIns="0" rIns="0" bIns="0" rtlCol="0" anchor="ctr"/>
-          <a:lstStyle/>
-          <a:p>
-            <a:pPr rtl="1" algn="r" indent="0" marL="0">
-              <a:buNone/>
-            </a:pPr>
-            <a:r>
-              <a:rPr lang="ar-SA" altLang="en-US" sz="1650" b="1" dirty="0">
-                <a:solidFill>
-                  <a:srgbClr val="FFFFFF"/>
-                </a:solidFill>
-                <a:latin typeface="Arial" pitchFamily="34" charset="0"/>
-                <a:ea typeface="Arial" pitchFamily="34" charset="-122"/>
-                <a:cs typeface="Arial" pitchFamily="34" charset="-120"/>
-              </a:rPr>
-              <a:t>يصل الجواب بمصدره</a:t>
-            </a:r>
-            <a:endParaRPr lang="ar-SA" sz="1650" dirty="0"/>
-          </a:p>
-        </p:txBody>
-      </p:sp>
-      <p:sp>
-        <p:nvSpPr>
-          <p:cNvPr id="22" name="Text 20"/>
-          <p:cNvSpPr txBox="1"/>
-          <p:nvPr/>
-        </p:nvSpPr>
-        <p:spPr>
-          <a:xfrm>
-            <a:off x="475488" y="3401568"/>
-            <a:ext cx="2148840" cy="1325880"/>
-          </a:xfrm>
-          <a:prstGeom prst="rect">
-            <a:avLst/>
-          </a:prstGeom>
-          <a:noFill/>
-          <a:ln/>
-        </p:spPr>
-        <p:txBody>
-          <a:bodyPr wrap="square" lIns="0" tIns="0" rIns="0" bIns="0" rtlCol="0" anchor="ctr"/>
-          <a:lstStyle/>
-          <a:p>
-            <a:pPr rtl="1" algn="r" indent="0" marL="0">
-              <a:lnSpc>
-                <a:spcPct val="120000"/>
-              </a:lnSpc>
-              <a:buNone/>
-            </a:pPr>
-            <a:r>
-              <a:rPr lang="ar-SA" altLang="en-US" sz="1250" dirty="0">
-                <a:solidFill>
-                  <a:srgbClr val="E8F0F7"/>
-                </a:solidFill>
-                <a:latin typeface="Arial" pitchFamily="34" charset="0"/>
-                <a:ea typeface="Arial" pitchFamily="34" charset="-122"/>
-                <a:cs typeface="Arial" pitchFamily="34" charset="-120"/>
-              </a:rPr>
-              <a:t>اسم المستند والصفحة، ودرجة ثقة، وتحذير على أي رقم غير مؤكد.</a:t>
-            </a:r>
-            <a:endParaRPr lang="ar-SA" sz="1250" dirty="0"/>
-          </a:p>
-        </p:txBody>
-      </p:sp>
-      <p:sp>
-        <p:nvSpPr>
-          <p:cNvPr id="23" name="Text 21"/>
+          <p:cNvPr id="18" name="Text 16"/>
           <p:cNvSpPr txBox="1"/>
           <p:nvPr/>
         </p:nvSpPr>
@@ -3735,7 +3228,7 @@
                 <a:ea typeface="Arial" pitchFamily="34" charset="-122"/>
                 <a:cs typeface="Arial" pitchFamily="34" charset="-120"/>
               </a:rPr>
-              <a:t>لا تركيب على خوادمكم، ولا مشروع توثيق قبل البدء، ولا رسوم تأسيس.</a:t>
+              <a:t>جاهزة في يوم واحد — بلا تركيب، وبلا تدريب لفريقكم، وبلا رسوم تأسيس.</a:t>
             </a:r>
             <a:endParaRPr lang="ar-SA" sz="1500" dirty="0"/>
           </a:p>
@@ -3806,7 +3299,7 @@
                 <a:ea typeface="Arial" pitchFamily="34" charset="-122"/>
                 <a:cs typeface="Arial" pitchFamily="34" charset="-120"/>
               </a:rPr>
-              <a:t>لا نطلب منكم الثقة — نعطيكم طريق المراجعة</a:t>
+              <a:t>لماذا تثقون بجوابها؟</a:t>
             </a:r>
             <a:endParaRPr lang="ar-SA" sz="3200" dirty="0"/>
           </a:p>
@@ -3911,7 +3404,7 @@
                 <a:ea typeface="Arial" pitchFamily="34" charset="-122"/>
                 <a:cs typeface="Arial" pitchFamily="34" charset="-120"/>
               </a:rPr>
-              <a:t>إجابة تُراجَع لا تُصدَّق</a:t>
+              <a:t>كل رقم يُراجَع تلقائيًا</a:t>
             </a:r>
             <a:endParaRPr lang="ar-SA" sz="1700" dirty="0"/>
           </a:p>
@@ -3953,7 +3446,7 @@
                 <a:ea typeface="Arial" pitchFamily="34" charset="-122"/>
                 <a:cs typeface="Arial" pitchFamily="34" charset="-120"/>
               </a:rPr>
-              <a:t>كل مدة ومبلغ ونسبة في الإجابة تُقارن بالمستند نفسه. ما لم يرد في المصدر يظهر عليه تحذير يسمّيه — ودرجة ثقة ظاهرة مع كل جواب.</a:t>
+              <a:t>كل مدة ومبلغ ونسبة تُقارن بالمستند قبل أن تصلكم — وما لم نجده في المصدر نُعلّم عليه بتحذير واضح.</a:t>
             </a:r>
             <a:endParaRPr lang="ar-SA" sz="1300" dirty="0"/>
           </a:p>
@@ -4058,7 +3551,7 @@
                 <a:ea typeface="Arial" pitchFamily="34" charset="-122"/>
                 <a:cs typeface="Arial" pitchFamily="34" charset="-120"/>
               </a:rPr>
-              <a:t>تكشف نقص توثيقكم</a:t>
+              <a:t>المصدر والصفحة مع كل جواب</a:t>
             </a:r>
             <a:endParaRPr lang="ar-SA" sz="1700" dirty="0"/>
           </a:p>
@@ -4100,7 +3593,7 @@
                 <a:ea typeface="Arial" pitchFamily="34" charset="-122"/>
                 <a:cs typeface="Arial" pitchFamily="34" charset="-120"/>
               </a:rPr>
-              <a:t>كل سؤال بلا جواب يُسجَّل. بعد شهر لديكم قائمة بما لم تكتبوه ويحتاجه فريقكم فعلًا — مرتّبة بتكرار السؤال.</a:t>
+              <a:t>لا «صدّقنا» — بل «راجعوا بأنفسكم». كل إجابة تحمل اسم المستند ورقم الصفحة ودرجة الثقة.</a:t>
             </a:r>
             <a:endParaRPr lang="ar-SA" sz="1300" dirty="0"/>
           </a:p>
@@ -4205,7 +3698,7 @@
                 <a:ea typeface="Arial" pitchFamily="34" charset="-122"/>
                 <a:cs typeface="Arial" pitchFamily="34" charset="-120"/>
               </a:rPr>
-              <a:t>تقول «لا أعرف»</a:t>
+              <a:t>وتصارحكم حين لا تعرف</a:t>
             </a:r>
             <a:endParaRPr lang="ar-SA" sz="1700" dirty="0"/>
           </a:p>
@@ -4247,7 +3740,7 @@
                 <a:ea typeface="Arial" pitchFamily="34" charset="-122"/>
                 <a:cs typeface="Arial" pitchFamily="34" charset="-120"/>
               </a:rPr>
-              <a:t>حين لا تجد المصدر تقولها صراحة بدل اختراع جوابٍ معقول الشكل — والاختراع في لائحة أخطر من الصمت.</a:t>
+              <a:t>إن لم يكن الجواب في وثائقكم قالتها بوضوح — لا تخترع جوابًا يبدو مقنعًا. فالخطأ الواثق أخطر من الصمت.</a:t>
             </a:r>
             <a:endParaRPr lang="ar-SA" sz="1300" dirty="0"/>
           </a:p>
@@ -4318,7 +3811,7 @@
                 <a:ea typeface="Arial" pitchFamily="34" charset="-122"/>
                 <a:cs typeface="Arial" pitchFamily="34" charset="-120"/>
               </a:rPr>
-              <a:t>وما لا تجيب عنه وثائقكم — يقوله لكم</a:t>
+              <a:t>تكشف لكم ما ينقص توثيقكم — قبل أن يكلّفكم</a:t>
             </a:r>
             <a:endParaRPr lang="ar-SA" sz="3200" dirty="0"/>
           </a:p>
@@ -5050,7 +4543,7 @@
                 <a:ea typeface="Arial" pitchFamily="34" charset="-122"/>
                 <a:cs typeface="Arial" pitchFamily="34" charset="-120"/>
               </a:rPr>
-              <a:t>قيمةٌ تكبر مع الوقت: المنتج لا يخدم معرفتكم الحالية فحسب — بل يبني الناقصة.</a:t>
+              <a:t>كل شهر: تقرير جاهز بما يسأل عنه فريقكم ولا يجد جوابه — مرتّبًا بالأهمية.</a:t>
             </a:r>
             <a:endParaRPr lang="ar-SA" sz="1550" dirty="0"/>
           </a:p>
@@ -5070,7 +4563,7 @@
     <p:bg>
       <p:bgPr>
         <a:solidFill>
-          <a:srgbClr val="132A3E"/>
+          <a:srgbClr val="FFFFFF"/>
         </a:solidFill>
       </p:bgPr>
     </p:bg>
@@ -5115,13 +4608,13 @@
             <a:r>
               <a:rPr lang="ar-SA" altLang="en-US" sz="3200" b="1" dirty="0">
                 <a:solidFill>
-                  <a:srgbClr val="FFFFFF"/>
-                </a:solidFill>
-                <a:latin typeface="Arial" pitchFamily="34" charset="0"/>
-                <a:ea typeface="Arial" pitchFamily="34" charset="-122"/>
-                <a:cs typeface="Arial" pitchFamily="34" charset="-120"/>
-              </a:rPr>
-              <a:t>بيانات شركتكم في حدودها — والاختبار يثبته</a:t>
+                  <a:srgbClr val="1A2B3A"/>
+                </a:solidFill>
+                <a:latin typeface="Arial" pitchFamily="34" charset="0"/>
+                <a:ea typeface="Arial" pitchFamily="34" charset="-122"/>
+                <a:cs typeface="Arial" pitchFamily="34" charset="-120"/>
+              </a:rPr>
+              <a:t>جرّبوها على لائحتكم — في هذا الاجتماع</a:t>
             </a:r>
             <a:endParaRPr lang="ar-SA" sz="3200" dirty="0"/>
           </a:p>
@@ -5129,36 +4622,75 @@
       </p:sp>
       <p:sp>
         <p:nvSpPr>
-          <p:cNvPr id="3" name="Shape 1"/>
+          <p:cNvPr id="3" name="Text 1"/>
+          <p:cNvSpPr txBox="1"/>
+          <p:nvPr/>
+        </p:nvSpPr>
+        <p:spPr>
+          <a:xfrm>
+            <a:off x="640080" y="1371600"/>
+            <a:ext cx="10908792" cy="502920"/>
+          </a:xfrm>
+          <a:prstGeom prst="rect">
+            <a:avLst/>
+          </a:prstGeom>
+          <a:noFill/>
+          <a:ln/>
+        </p:spPr>
+        <p:txBody>
+          <a:bodyPr wrap="square" lIns="0" tIns="0" rIns="0" bIns="0" rtlCol="0" anchor="ctr"/>
+          <a:lstStyle/>
+          <a:p>
+            <a:pPr rtl="1" algn="r" indent="0" marL="0">
+              <a:buNone/>
+            </a:pPr>
+            <a:r>
+              <a:rPr lang="ar-SA" altLang="en-US" sz="1700" dirty="0">
+                <a:solidFill>
+                  <a:srgbClr val="5B6B7A"/>
+                </a:solidFill>
+                <a:latin typeface="Arial" pitchFamily="34" charset="0"/>
+                <a:ea typeface="Arial" pitchFamily="34" charset="-122"/>
+                <a:cs typeface="Arial" pitchFamily="34" charset="-120"/>
+              </a:rPr>
+              <a:t>أعطونا مستندًا واحدًا الآن أو قبل الاجتماع، ثم اسألوه أنتم بأنفسكم.</a:t>
+            </a:r>
+            <a:endParaRPr lang="ar-SA" sz="1700" dirty="0"/>
+          </a:p>
+        </p:txBody>
+      </p:sp>
+      <p:sp>
+        <p:nvSpPr>
+          <p:cNvPr id="4" name="Shape 2"/>
           <p:cNvSpPr/>
           <p:nvPr/>
         </p:nvSpPr>
         <p:spPr>
           <a:xfrm>
-            <a:off x="8028432" y="1737360"/>
-            <a:ext cx="3520440" cy="2286000"/>
+            <a:off x="3108960" y="2286000"/>
+            <a:ext cx="5943600" cy="603504"/>
           </a:xfrm>
           <a:prstGeom prst="roundRect">
             <a:avLst>
-              <a:gd name="adj" fmla="val 4800"/>
+              <a:gd name="adj" fmla="val 19697"/>
             </a:avLst>
           </a:prstGeom>
           <a:solidFill>
-            <a:srgbClr val="1B3A54"/>
+            <a:srgbClr val="2A6C9E"/>
           </a:solidFill>
           <a:ln/>
         </p:spPr>
       </p:sp>
       <p:sp>
         <p:nvSpPr>
-          <p:cNvPr id="4" name="Text 2"/>
-          <p:cNvSpPr txBox="1"/>
-          <p:nvPr/>
-        </p:nvSpPr>
-        <p:spPr>
-          <a:xfrm>
-            <a:off x="8257032" y="1920240"/>
-            <a:ext cx="3063240" cy="777240"/>
+          <p:cNvPr id="5" name="Text 3"/>
+          <p:cNvSpPr txBox="1"/>
+          <p:nvPr/>
+        </p:nvSpPr>
+        <p:spPr>
+          <a:xfrm>
+            <a:off x="3383280" y="2286000"/>
+            <a:ext cx="5394960" cy="603504"/>
           </a:xfrm>
           <a:prstGeom prst="rect">
             <a:avLst/>
@@ -5174,46 +4706,7 @@
               <a:buNone/>
             </a:pPr>
             <a:r>
-              <a:rPr lang="ar-SA" altLang="en-US" sz="4000" b="1" dirty="0">
-                <a:solidFill>
-                  <a:srgbClr val="C9A227"/>
-                </a:solidFill>
-                <a:latin typeface="Arial" pitchFamily="34" charset="0"/>
-                <a:ea typeface="Arial" pitchFamily="34" charset="-122"/>
-                <a:cs typeface="Arial" pitchFamily="34" charset="-120"/>
-              </a:rPr>
-              <a:t>٢٠٦ / ٢٠٦</a:t>
-            </a:r>
-            <a:endParaRPr lang="ar-SA" sz="4000" dirty="0"/>
-          </a:p>
-        </p:txBody>
-      </p:sp>
-      <p:sp>
-        <p:nvSpPr>
-          <p:cNvPr id="5" name="Text 3"/>
-          <p:cNvSpPr txBox="1"/>
-          <p:nvPr/>
-        </p:nvSpPr>
-        <p:spPr>
-          <a:xfrm>
-            <a:off x="8257032" y="2743200"/>
-            <a:ext cx="3063240" cy="457200"/>
-          </a:xfrm>
-          <a:prstGeom prst="rect">
-            <a:avLst/>
-          </a:prstGeom>
-          <a:noFill/>
-          <a:ln/>
-        </p:spPr>
-        <p:txBody>
-          <a:bodyPr wrap="square" lIns="0" tIns="0" rIns="0" bIns="0" rtlCol="0" anchor="ctr"/>
-          <a:lstStyle/>
-          <a:p>
-            <a:pPr rtl="1" algn="r" indent="0" marL="0">
-              <a:buNone/>
-            </a:pPr>
-            <a:r>
-              <a:rPr lang="ar-SA" altLang="en-US" sz="1450" b="1" dirty="0">
+              <a:rPr lang="ar-SA" altLang="en-US" sz="1500" dirty="0">
                 <a:solidFill>
                   <a:srgbClr val="FFFFFF"/>
                 </a:solidFill>
@@ -5221,75 +4714,77 @@
                 <a:ea typeface="Arial" pitchFamily="34" charset="-122"/>
                 <a:cs typeface="Arial" pitchFamily="34" charset="-120"/>
               </a:rPr>
-              <a:t>اختبار عزل بين الشركات</a:t>
-            </a:r>
-            <a:endParaRPr lang="ar-SA" sz="1450" dirty="0"/>
-          </a:p>
-        </p:txBody>
-      </p:sp>
-      <p:sp>
-        <p:nvSpPr>
-          <p:cNvPr id="6" name="Text 4"/>
-          <p:cNvSpPr txBox="1"/>
-          <p:nvPr/>
-        </p:nvSpPr>
-        <p:spPr>
-          <a:xfrm>
-            <a:off x="8257032" y="3200400"/>
-            <a:ext cx="3063240" cy="731520"/>
-          </a:xfrm>
-          <a:prstGeom prst="rect">
-            <a:avLst/>
-          </a:prstGeom>
-          <a:noFill/>
-          <a:ln/>
-        </p:spPr>
-        <p:txBody>
-          <a:bodyPr wrap="square" lIns="0" tIns="0" rIns="0" bIns="0" rtlCol="0" anchor="ctr"/>
-          <a:lstStyle/>
-          <a:p>
-            <a:pPr rtl="1" algn="r" indent="0" marL="0">
-              <a:lnSpc>
-                <a:spcPct val="115000"/>
-              </a:lnSpc>
-              <a:buNone/>
-            </a:pPr>
-            <a:r>
-              <a:rPr lang="ar-SA" altLang="en-US" sz="1150" dirty="0">
-                <a:solidFill>
-                  <a:srgbClr val="9FB4C6"/>
-                </a:solidFill>
-                <a:latin typeface="Arial" pitchFamily="34" charset="0"/>
-                <a:ea typeface="Arial" pitchFamily="34" charset="-122"/>
-                <a:cs typeface="Arial" pitchFamily="34" charset="-120"/>
-              </a:rPr>
-              <a:t>تُنفَّذ بدور المستخدم على قاعدة حقيقية</a:t>
-            </a:r>
-            <a:endParaRPr lang="ar-SA" sz="1150" dirty="0"/>
-          </a:p>
-        </p:txBody>
-      </p:sp>
-      <p:sp>
-        <p:nvSpPr>
-          <p:cNvPr id="7" name="Shape 5"/>
+              <a:t>سؤالكم — بصياغتكم أنتم، ولو بالعامية</a:t>
+            </a:r>
+            <a:endParaRPr lang="ar-SA" sz="1500" dirty="0"/>
+          </a:p>
+        </p:txBody>
+      </p:sp>
+      <p:sp>
+        <p:nvSpPr>
+          <p:cNvPr id="6" name="Shape 4"/>
           <p:cNvSpPr/>
           <p:nvPr/>
         </p:nvSpPr>
         <p:spPr>
           <a:xfrm>
-            <a:off x="4187952" y="1737360"/>
-            <a:ext cx="3520440" cy="2286000"/>
+            <a:off x="3108960" y="3108960"/>
+            <a:ext cx="5943600" cy="1600200"/>
           </a:xfrm>
           <a:prstGeom prst="roundRect">
             <a:avLst>
-              <a:gd name="adj" fmla="val 4800"/>
+              <a:gd name="adj" fmla="val 7429"/>
             </a:avLst>
           </a:prstGeom>
           <a:solidFill>
-            <a:srgbClr val="1B3A54"/>
+            <a:srgbClr val="EDF3F8"/>
           </a:solidFill>
-          <a:ln/>
-        </p:spPr>
+          <a:ln w="12700">
+            <a:solidFill>
+              <a:srgbClr val="2A6C9E"/>
+            </a:solidFill>
+            <a:prstDash val="solid"/>
+          </a:ln>
+        </p:spPr>
+      </p:sp>
+      <p:sp>
+        <p:nvSpPr>
+          <p:cNvPr id="7" name="Text 5"/>
+          <p:cNvSpPr txBox="1"/>
+          <p:nvPr/>
+        </p:nvSpPr>
+        <p:spPr>
+          <a:xfrm>
+            <a:off x="3383280" y="3246120"/>
+            <a:ext cx="5394960" cy="457200"/>
+          </a:xfrm>
+          <a:prstGeom prst="rect">
+            <a:avLst/>
+          </a:prstGeom>
+          <a:noFill/>
+          <a:ln/>
+        </p:spPr>
+        <p:txBody>
+          <a:bodyPr wrap="square" lIns="0" tIns="0" rIns="0" bIns="0" rtlCol="0" anchor="ctr"/>
+          <a:lstStyle/>
+          <a:p>
+            <a:pPr rtl="1" algn="r" indent="0" marL="0">
+              <a:buNone/>
+            </a:pPr>
+            <a:r>
+              <a:rPr lang="ar-SA" altLang="en-US" sz="1500" b="1" dirty="0">
+                <a:solidFill>
+                  <a:srgbClr val="1A2B3A"/>
+                </a:solidFill>
+                <a:latin typeface="Arial" pitchFamily="34" charset="0"/>
+                <a:ea typeface="Arial" pitchFamily="34" charset="-122"/>
+                <a:cs typeface="Arial" pitchFamily="34" charset="-120"/>
+              </a:rPr>
+              <a:t>الجواب من مستندكم، لا من الإنترنت</a:t>
+            </a:r>
+            <a:endParaRPr lang="ar-SA" sz="1500" dirty="0"/>
+          </a:p>
+        </p:txBody>
       </p:sp>
       <p:sp>
         <p:nvSpPr>
@@ -5299,8 +4794,8 @@
         </p:nvSpPr>
         <p:spPr>
           <a:xfrm>
-            <a:off x="4416552" y="1920240"/>
-            <a:ext cx="3063240" cy="777240"/>
+            <a:off x="3383280" y="3730752"/>
+            <a:ext cx="5394960" cy="411480"/>
           </a:xfrm>
           <a:prstGeom prst="rect">
             <a:avLst/>
@@ -5316,122 +4811,124 @@
               <a:buNone/>
             </a:pPr>
             <a:r>
-              <a:rPr lang="ar-SA" altLang="en-US" sz="4000" b="1" dirty="0">
-                <a:solidFill>
-                  <a:srgbClr val="C9A227"/>
-                </a:solidFill>
-                <a:latin typeface="Arial" pitchFamily="34" charset="0"/>
-                <a:ea typeface="Arial" pitchFamily="34" charset="-122"/>
-                <a:cs typeface="Arial" pitchFamily="34" charset="-120"/>
-              </a:rPr>
-              <a:t>٣١ / ٣١</a:t>
-            </a:r>
-            <a:endParaRPr lang="ar-SA" sz="4000" dirty="0"/>
-          </a:p>
-        </p:txBody>
-      </p:sp>
-      <p:sp>
-        <p:nvSpPr>
-          <p:cNvPr id="9" name="Text 7"/>
-          <p:cNvSpPr txBox="1"/>
-          <p:nvPr/>
-        </p:nvSpPr>
-        <p:spPr>
-          <a:xfrm>
-            <a:off x="4416552" y="2743200"/>
-            <a:ext cx="3063240" cy="457200"/>
-          </a:xfrm>
-          <a:prstGeom prst="rect">
-            <a:avLst/>
-          </a:prstGeom>
-          <a:noFill/>
-          <a:ln/>
-        </p:spPr>
-        <p:txBody>
-          <a:bodyPr wrap="square" lIns="0" tIns="0" rIns="0" bIns="0" rtlCol="0" anchor="ctr"/>
-          <a:lstStyle/>
-          <a:p>
-            <a:pPr rtl="1" algn="r" indent="0" marL="0">
-              <a:buNone/>
-            </a:pPr>
-            <a:r>
-              <a:rPr lang="ar-SA" altLang="en-US" sz="1450" b="1" dirty="0">
-                <a:solidFill>
-                  <a:srgbClr val="FFFFFF"/>
-                </a:solidFill>
-                <a:latin typeface="Arial" pitchFamily="34" charset="0"/>
-                <a:ea typeface="Arial" pitchFamily="34" charset="-122"/>
-                <a:cs typeface="Arial" pitchFamily="34" charset="-120"/>
-              </a:rPr>
-              <a:t>جدولًا محميًّا على مستوى الصف</a:t>
-            </a:r>
-            <a:endParaRPr lang="ar-SA" sz="1450" dirty="0"/>
-          </a:p>
-        </p:txBody>
-      </p:sp>
-      <p:sp>
-        <p:nvSpPr>
-          <p:cNvPr id="10" name="Text 8"/>
-          <p:cNvSpPr txBox="1"/>
-          <p:nvPr/>
-        </p:nvSpPr>
-        <p:spPr>
-          <a:xfrm>
-            <a:off x="4416552" y="3200400"/>
-            <a:ext cx="3063240" cy="731520"/>
-          </a:xfrm>
-          <a:prstGeom prst="rect">
-            <a:avLst/>
-          </a:prstGeom>
-          <a:noFill/>
-          <a:ln/>
-        </p:spPr>
-        <p:txBody>
-          <a:bodyPr wrap="square" lIns="0" tIns="0" rIns="0" bIns="0" rtlCol="0" anchor="ctr"/>
-          <a:lstStyle/>
-          <a:p>
-            <a:pPr rtl="1" algn="r" indent="0" marL="0">
-              <a:lnSpc>
-                <a:spcPct val="115000"/>
-              </a:lnSpc>
-              <a:buNone/>
-            </a:pPr>
-            <a:r>
-              <a:rPr lang="ar-SA" altLang="en-US" sz="1150" dirty="0">
-                <a:solidFill>
-                  <a:srgbClr val="9FB4C6"/>
-                </a:solidFill>
-                <a:latin typeface="Arial" pitchFamily="34" charset="0"/>
-                <a:ea typeface="Arial" pitchFamily="34" charset="-122"/>
-                <a:cs typeface="Arial" pitchFamily="34" charset="-120"/>
-              </a:rPr>
-              <a:t>العزل في قاعدة البيانات لا في الواجهة</a:t>
-            </a:r>
-            <a:endParaRPr lang="ar-SA" sz="1150" dirty="0"/>
-          </a:p>
-        </p:txBody>
-      </p:sp>
-      <p:sp>
-        <p:nvSpPr>
-          <p:cNvPr id="11" name="Shape 9"/>
+              <a:rPr lang="ar-SA" altLang="en-US" sz="1300" dirty="0">
+                <a:solidFill>
+                  <a:srgbClr val="5B6B7A"/>
+                </a:solidFill>
+                <a:latin typeface="Arial" pitchFamily="34" charset="0"/>
+                <a:ea typeface="Arial" pitchFamily="34" charset="-122"/>
+                <a:cs typeface="Arial" pitchFamily="34" charset="-120"/>
+              </a:rPr>
+              <a:t>وتحته المصدر الذي تراجعونه بأنفسكم في ثلاثين ثانية:</a:t>
+            </a:r>
+            <a:endParaRPr lang="ar-SA" sz="1300" dirty="0"/>
+          </a:p>
+        </p:txBody>
+      </p:sp>
+      <p:sp>
+        <p:nvSpPr>
+          <p:cNvPr id="9" name="Shape 7"/>
           <p:cNvSpPr/>
           <p:nvPr/>
         </p:nvSpPr>
         <p:spPr>
           <a:xfrm>
-            <a:off x="347472" y="1737360"/>
-            <a:ext cx="3520440" cy="2286000"/>
+            <a:off x="3383280" y="4160520"/>
+            <a:ext cx="2926080" cy="384048"/>
           </a:xfrm>
           <a:prstGeom prst="roundRect">
             <a:avLst>
-              <a:gd name="adj" fmla="val 4800"/>
+              <a:gd name="adj" fmla="val 50000"/>
             </a:avLst>
           </a:prstGeom>
           <a:solidFill>
-            <a:srgbClr val="1B3A54"/>
+            <a:srgbClr val="EDF3F8"/>
           </a:solidFill>
-          <a:ln/>
-        </p:spPr>
+          <a:ln w="9525">
+            <a:solidFill>
+              <a:srgbClr val="2A6C9E"/>
+            </a:solidFill>
+            <a:prstDash val="solid"/>
+          </a:ln>
+        </p:spPr>
+      </p:sp>
+      <p:sp>
+        <p:nvSpPr>
+          <p:cNvPr id="10" name="Text 8"/>
+          <p:cNvSpPr txBox="1"/>
+          <p:nvPr/>
+        </p:nvSpPr>
+        <p:spPr>
+          <a:xfrm>
+            <a:off x="3383280" y="4160520"/>
+            <a:ext cx="2926080" cy="384048"/>
+          </a:xfrm>
+          <a:prstGeom prst="rect">
+            <a:avLst/>
+          </a:prstGeom>
+          <a:noFill/>
+          <a:ln/>
+        </p:spPr>
+        <p:txBody>
+          <a:bodyPr wrap="square" lIns="0" tIns="0" rIns="0" bIns="0" rtlCol="0" anchor="ctr"/>
+          <a:lstStyle/>
+          <a:p>
+            <a:pPr rtl="1" algn="ctr" indent="0" marL="0">
+              <a:buNone/>
+            </a:pPr>
+            <a:r>
+              <a:rPr lang="ar-SA" altLang="en-US" sz="1150" b="1" dirty="0">
+                <a:solidFill>
+                  <a:srgbClr val="1E5075"/>
+                </a:solidFill>
+                <a:latin typeface="Arial" pitchFamily="34" charset="0"/>
+                <a:ea typeface="Arial" pitchFamily="34" charset="-122"/>
+                <a:cs typeface="Arial" pitchFamily="34" charset="-120"/>
+              </a:rPr>
+              <a:t>لائحتكم · الصفحة · درجة الثقة</a:t>
+            </a:r>
+            <a:endParaRPr lang="ar-SA" sz="1150" dirty="0"/>
+          </a:p>
+        </p:txBody>
+      </p:sp>
+      <p:sp>
+        <p:nvSpPr>
+          <p:cNvPr id="11" name="Text 9"/>
+          <p:cNvSpPr txBox="1"/>
+          <p:nvPr/>
+        </p:nvSpPr>
+        <p:spPr>
+          <a:xfrm>
+            <a:off x="640080" y="5074920"/>
+            <a:ext cx="10908792" cy="502920"/>
+          </a:xfrm>
+          <a:prstGeom prst="rect">
+            <a:avLst/>
+          </a:prstGeom>
+          <a:noFill/>
+          <a:ln/>
+        </p:spPr>
+        <p:txBody>
+          <a:bodyPr wrap="square" lIns="0" tIns="0" rIns="0" bIns="0" rtlCol="0" anchor="ctr"/>
+          <a:lstStyle/>
+          <a:p>
+            <a:pPr rtl="1" algn="r" indent="0" marL="0">
+              <a:buNone/>
+            </a:pPr>
+            <a:r>
+              <a:rPr lang="ar-SA" altLang="en-US" sz="1550" b="1" dirty="0">
+                <a:solidFill>
+                  <a:srgbClr val="1E5075"/>
+                </a:solidFill>
+                <a:latin typeface="Arial" pitchFamily="34" charset="0"/>
+                <a:ea typeface="Arial" pitchFamily="34" charset="-122"/>
+                <a:cs typeface="Arial" pitchFamily="34" charset="-120"/>
+              </a:rPr>
+              <a:t>اختبروها بسؤالٍ تعرفون جوابه — وبسؤالٍ تعرفون أن لا جواب له في الملف. الثاني أهم.</a:t>
+            </a:r>
+            <a:endParaRPr lang="ar-SA" sz="1550" dirty="0"/>
+          </a:p>
+        </p:txBody>
       </p:sp>
       <p:sp>
         <p:nvSpPr>
@@ -5441,8 +4938,8 @@
         </p:nvSpPr>
         <p:spPr>
           <a:xfrm>
-            <a:off x="576072" y="1920240"/>
-            <a:ext cx="3063240" cy="777240"/>
+            <a:off x="640080" y="5623560"/>
+            <a:ext cx="10908792" cy="457200"/>
           </a:xfrm>
           <a:prstGeom prst="rect">
             <a:avLst/>
@@ -5458,287 +4955,17 @@
               <a:buNone/>
             </a:pPr>
             <a:r>
-              <a:rPr lang="ar-SA" altLang="en-US" sz="4000" b="1" dirty="0">
-                <a:solidFill>
-                  <a:srgbClr val="C9A227"/>
-                </a:solidFill>
-                <a:latin typeface="Arial" pitchFamily="34" charset="0"/>
-                <a:ea typeface="Arial" pitchFamily="34" charset="-122"/>
-                <a:cs typeface="Arial" pitchFamily="34" charset="-120"/>
-              </a:rPr>
-              <a:t>٣٢</a:t>
-            </a:r>
-            <a:endParaRPr lang="ar-SA" sz="4000" dirty="0"/>
-          </a:p>
-        </p:txBody>
-      </p:sp>
-      <p:sp>
-        <p:nvSpPr>
-          <p:cNvPr id="13" name="Text 11"/>
-          <p:cNvSpPr txBox="1"/>
-          <p:nvPr/>
-        </p:nvSpPr>
-        <p:spPr>
-          <a:xfrm>
-            <a:off x="576072" y="2743200"/>
-            <a:ext cx="3063240" cy="457200"/>
-          </a:xfrm>
-          <a:prstGeom prst="rect">
-            <a:avLst/>
-          </a:prstGeom>
-          <a:noFill/>
-          <a:ln/>
-        </p:spPr>
-        <p:txBody>
-          <a:bodyPr wrap="square" lIns="0" tIns="0" rIns="0" bIns="0" rtlCol="0" anchor="ctr"/>
-          <a:lstStyle/>
-          <a:p>
-            <a:pPr rtl="1" algn="r" indent="0" marL="0">
-              <a:buNone/>
-            </a:pPr>
-            <a:r>
-              <a:rPr lang="ar-SA" altLang="en-US" sz="1450" b="1" dirty="0">
-                <a:solidFill>
-                  <a:srgbClr val="FFFFFF"/>
-                </a:solidFill>
-                <a:latin typeface="Arial" pitchFamily="34" charset="0"/>
-                <a:ea typeface="Arial" pitchFamily="34" charset="-122"/>
-                <a:cs typeface="Arial" pitchFamily="34" charset="-120"/>
-              </a:rPr>
-              <a:t>اختبارًا يسقط عمدًا</a:t>
-            </a:r>
-            <a:endParaRPr lang="ar-SA" sz="1450" dirty="0"/>
-          </a:p>
-        </p:txBody>
-      </p:sp>
-      <p:sp>
-        <p:nvSpPr>
-          <p:cNvPr id="14" name="Text 12"/>
-          <p:cNvSpPr txBox="1"/>
-          <p:nvPr/>
-        </p:nvSpPr>
-        <p:spPr>
-          <a:xfrm>
-            <a:off x="576072" y="3200400"/>
-            <a:ext cx="3063240" cy="731520"/>
-          </a:xfrm>
-          <a:prstGeom prst="rect">
-            <a:avLst/>
-          </a:prstGeom>
-          <a:noFill/>
-          <a:ln/>
-        </p:spPr>
-        <p:txBody>
-          <a:bodyPr wrap="square" lIns="0" tIns="0" rIns="0" bIns="0" rtlCol="0" anchor="ctr"/>
-          <a:lstStyle/>
-          <a:p>
-            <a:pPr rtl="1" algn="r" indent="0" marL="0">
-              <a:lnSpc>
-                <a:spcPct val="115000"/>
-              </a:lnSpc>
-              <a:buNone/>
-            </a:pPr>
-            <a:r>
-              <a:rPr lang="ar-SA" altLang="en-US" sz="1150" dirty="0">
-                <a:solidFill>
-                  <a:srgbClr val="9FB4C6"/>
-                </a:solidFill>
-                <a:latin typeface="Arial" pitchFamily="34" charset="0"/>
-                <a:ea typeface="Arial" pitchFamily="34" charset="-122"/>
-                <a:cs typeface="Arial" pitchFamily="34" charset="-120"/>
-              </a:rPr>
-              <a:t>نعطّل الحماية فتكشفها الاختبارات — دليل أنها تعمل</a:t>
-            </a:r>
-            <a:endParaRPr lang="ar-SA" sz="1150" dirty="0"/>
-          </a:p>
-        </p:txBody>
-      </p:sp>
-      <p:pic>
-        <p:nvPicPr>
-          <p:cNvPr id="15" name="Image 0" descr="preencoded.png">    </p:cNvPr>
-          <p:cNvPicPr>
-            <a:picLocks noChangeAspect="1"/>
-          </p:cNvPicPr>
-          <p:nvPr/>
-        </p:nvPicPr>
-        <p:blipFill>
-          <a:blip r:embed="rId1"/>
-          <a:stretch>
-            <a:fillRect/>
-          </a:stretch>
-        </p:blipFill>
-        <p:spPr>
-          <a:xfrm>
-            <a:off x="11137392" y="4398264"/>
-            <a:ext cx="310896" cy="310896"/>
-          </a:xfrm>
-          <a:prstGeom prst="rect">
-            <a:avLst/>
-          </a:prstGeom>
-        </p:spPr>
-      </p:pic>
-      <p:sp>
-        <p:nvSpPr>
-          <p:cNvPr id="16" name="Text 13"/>
-          <p:cNvSpPr txBox="1"/>
-          <p:nvPr/>
-        </p:nvSpPr>
-        <p:spPr>
-          <a:xfrm>
-            <a:off x="822960" y="4343400"/>
-            <a:ext cx="10131552" cy="457200"/>
-          </a:xfrm>
-          <a:prstGeom prst="rect">
-            <a:avLst/>
-          </a:prstGeom>
-          <a:noFill/>
-          <a:ln/>
-        </p:spPr>
-        <p:txBody>
-          <a:bodyPr wrap="square" lIns="0" tIns="0" rIns="0" bIns="0" rtlCol="0" anchor="ctr"/>
-          <a:lstStyle/>
-          <a:p>
-            <a:pPr rtl="1" algn="r" indent="0" marL="0">
-              <a:buNone/>
-            </a:pPr>
-            <a:r>
-              <a:rPr lang="ar-SA" altLang="en-US" sz="1450" dirty="0">
-                <a:solidFill>
-                  <a:srgbClr val="E8F0F7"/>
-                </a:solidFill>
-                <a:latin typeface="Arial" pitchFamily="34" charset="0"/>
-                <a:ea typeface="Arial" pitchFamily="34" charset="-122"/>
-                <a:cs typeface="Arial" pitchFamily="34" charset="-120"/>
-              </a:rPr>
-              <a:t>صلاحيات على مستوى المستند — ما لا يحق للموظف قراءته لا يصل المساعد أصلًا</a:t>
-            </a:r>
-            <a:endParaRPr lang="ar-SA" sz="1450" dirty="0"/>
-          </a:p>
-        </p:txBody>
-      </p:sp>
-      <p:pic>
-        <p:nvPicPr>
-          <p:cNvPr id="17" name="Image 1" descr="preencoded.png">    </p:cNvPr>
-          <p:cNvPicPr>
-            <a:picLocks noChangeAspect="1"/>
-          </p:cNvPicPr>
-          <p:nvPr/>
-        </p:nvPicPr>
-        <p:blipFill>
-          <a:blip r:embed="rId2"/>
-          <a:stretch>
-            <a:fillRect/>
-          </a:stretch>
-        </p:blipFill>
-        <p:spPr>
-          <a:xfrm>
-            <a:off x="11137392" y="5056632"/>
-            <a:ext cx="310896" cy="310896"/>
-          </a:xfrm>
-          <a:prstGeom prst="rect">
-            <a:avLst/>
-          </a:prstGeom>
-        </p:spPr>
-      </p:pic>
-      <p:sp>
-        <p:nvSpPr>
-          <p:cNvPr id="18" name="Text 14"/>
-          <p:cNvSpPr txBox="1"/>
-          <p:nvPr/>
-        </p:nvSpPr>
-        <p:spPr>
-          <a:xfrm>
-            <a:off x="822960" y="5001768"/>
-            <a:ext cx="10131552" cy="457200"/>
-          </a:xfrm>
-          <a:prstGeom prst="rect">
-            <a:avLst/>
-          </a:prstGeom>
-          <a:noFill/>
-          <a:ln/>
-        </p:spPr>
-        <p:txBody>
-          <a:bodyPr wrap="square" lIns="0" tIns="0" rIns="0" bIns="0" rtlCol="0" anchor="ctr"/>
-          <a:lstStyle/>
-          <a:p>
-            <a:pPr rtl="1" algn="r" indent="0" marL="0">
-              <a:buNone/>
-            </a:pPr>
-            <a:r>
-              <a:rPr lang="ar-SA" altLang="en-US" sz="1450" dirty="0">
-                <a:solidFill>
-                  <a:srgbClr val="E8F0F7"/>
-                </a:solidFill>
-                <a:latin typeface="Arial" pitchFamily="34" charset="0"/>
-                <a:ea typeface="Arial" pitchFamily="34" charset="-122"/>
-                <a:cs typeface="Arial" pitchFamily="34" charset="-120"/>
-              </a:rPr>
-              <a:t>مستنداتكم تُستعمل للإجابة عليكم وحدكم — ولا تدخل في تدريب أي نموذج</a:t>
-            </a:r>
-            <a:endParaRPr lang="ar-SA" sz="1450" dirty="0"/>
-          </a:p>
-        </p:txBody>
-      </p:sp>
-      <p:pic>
-        <p:nvPicPr>
-          <p:cNvPr id="19" name="Image 2" descr="preencoded.png">    </p:cNvPr>
-          <p:cNvPicPr>
-            <a:picLocks noChangeAspect="1"/>
-          </p:cNvPicPr>
-          <p:nvPr/>
-        </p:nvPicPr>
-        <p:blipFill>
-          <a:blip r:embed="rId3"/>
-          <a:stretch>
-            <a:fillRect/>
-          </a:stretch>
-        </p:blipFill>
-        <p:spPr>
-          <a:xfrm>
-            <a:off x="11137392" y="5715000"/>
-            <a:ext cx="310896" cy="310896"/>
-          </a:xfrm>
-          <a:prstGeom prst="rect">
-            <a:avLst/>
-          </a:prstGeom>
-        </p:spPr>
-      </p:pic>
-      <p:sp>
-        <p:nvSpPr>
-          <p:cNvPr id="20" name="Text 15"/>
-          <p:cNvSpPr txBox="1"/>
-          <p:nvPr/>
-        </p:nvSpPr>
-        <p:spPr>
-          <a:xfrm>
-            <a:off x="822960" y="5660136"/>
-            <a:ext cx="10131552" cy="457200"/>
-          </a:xfrm>
-          <a:prstGeom prst="rect">
-            <a:avLst/>
-          </a:prstGeom>
-          <a:noFill/>
-          <a:ln/>
-        </p:spPr>
-        <p:txBody>
-          <a:bodyPr wrap="square" lIns="0" tIns="0" rIns="0" bIns="0" rtlCol="0" anchor="ctr"/>
-          <a:lstStyle/>
-          <a:p>
-            <a:pPr rtl="1" algn="r" indent="0" marL="0">
-              <a:buNone/>
-            </a:pPr>
-            <a:r>
-              <a:rPr lang="ar-SA" altLang="en-US" sz="1450" dirty="0">
-                <a:solidFill>
-                  <a:srgbClr val="E8F0F7"/>
-                </a:solidFill>
-                <a:latin typeface="Arial" pitchFamily="34" charset="0"/>
-                <a:ea typeface="Arial" pitchFamily="34" charset="-122"/>
-                <a:cs typeface="Arial" pitchFamily="34" charset="-120"/>
-              </a:rPr>
-              <a:t>سجل تدقيق لكل عملية حساسة: من فعل ماذا ومتى</a:t>
-            </a:r>
-            <a:endParaRPr lang="ar-SA" sz="1450" dirty="0"/>
+              <a:rPr lang="ar-SA" altLang="en-US" sz="1250" dirty="0">
+                <a:solidFill>
+                  <a:srgbClr val="5B6B7A"/>
+                </a:solidFill>
+                <a:latin typeface="Arial" pitchFamily="34" charset="0"/>
+                <a:ea typeface="Arial" pitchFamily="34" charset="-122"/>
+                <a:cs typeface="Arial" pitchFamily="34" charset="-120"/>
+              </a:rPr>
+              <a:t>وبياناتكم لكم وحدكم — لا تُستخدم لتدريب أي نموذج، ولا يراها أحد غير فريقكم.</a:t>
+            </a:r>
+            <a:endParaRPr lang="ar-SA" sz="1250" dirty="0"/>
           </a:p>
         </p:txBody>
       </p:sp>
@@ -5807,7 +5034,7 @@
                 <a:ea typeface="Arial" pitchFamily="34" charset="-122"/>
                 <a:cs typeface="Arial" pitchFamily="34" charset="-120"/>
               </a:rPr>
-              <a:t>والآن — نجرّبها على لائحتكم أنتم</a:t>
+              <a:t>ابدؤوا اليوم — مجانًا وبلا التزام</a:t>
             </a:r>
             <a:endParaRPr lang="ar-SA" sz="3200" dirty="0"/>
           </a:p>
@@ -5815,57 +5042,18 @@
       </p:sp>
       <p:sp>
         <p:nvSpPr>
-          <p:cNvPr id="3" name="Text 1"/>
-          <p:cNvSpPr txBox="1"/>
-          <p:nvPr/>
-        </p:nvSpPr>
-        <p:spPr>
-          <a:xfrm>
-            <a:off x="640080" y="1371600"/>
-            <a:ext cx="10908792" cy="502920"/>
-          </a:xfrm>
-          <a:prstGeom prst="rect">
-            <a:avLst/>
-          </a:prstGeom>
-          <a:noFill/>
-          <a:ln/>
-        </p:spPr>
-        <p:txBody>
-          <a:bodyPr wrap="square" lIns="0" tIns="0" rIns="0" bIns="0" rtlCol="0" anchor="ctr"/>
-          <a:lstStyle/>
-          <a:p>
-            <a:pPr rtl="1" algn="r" indent="0" marL="0">
-              <a:buNone/>
-            </a:pPr>
-            <a:r>
-              <a:rPr lang="ar-SA" altLang="en-US" sz="1700" dirty="0">
-                <a:solidFill>
-                  <a:srgbClr val="5B6B7A"/>
-                </a:solidFill>
-                <a:latin typeface="Arial" pitchFamily="34" charset="0"/>
-                <a:ea typeface="Arial" pitchFamily="34" charset="-122"/>
-                <a:cs typeface="Arial" pitchFamily="34" charset="-120"/>
-              </a:rPr>
-              <a:t>أعطونا مستندًا واحدًا الآن أو قبل الاجتماع، ثم اسألوه أنتم بأنفسكم.</a:t>
-            </a:r>
-            <a:endParaRPr lang="ar-SA" sz="1700" dirty="0"/>
-          </a:p>
-        </p:txBody>
-      </p:sp>
-      <p:sp>
-        <p:nvSpPr>
-          <p:cNvPr id="4" name="Shape 2"/>
+          <p:cNvPr id="3" name="Shape 1"/>
           <p:cNvSpPr/>
           <p:nvPr/>
         </p:nvSpPr>
         <p:spPr>
           <a:xfrm>
-            <a:off x="3108960" y="2286000"/>
-            <a:ext cx="5943600" cy="603504"/>
+            <a:off x="7525512" y="1645920"/>
+            <a:ext cx="4023360" cy="3931920"/>
           </a:xfrm>
           <a:prstGeom prst="roundRect">
             <a:avLst>
-              <a:gd name="adj" fmla="val 19697"/>
+              <a:gd name="adj" fmla="val 3256"/>
             </a:avLst>
           </a:prstGeom>
           <a:solidFill>
@@ -5876,14 +5064,53 @@
       </p:sp>
       <p:sp>
         <p:nvSpPr>
+          <p:cNvPr id="4" name="Text 2"/>
+          <p:cNvSpPr txBox="1"/>
+          <p:nvPr/>
+        </p:nvSpPr>
+        <p:spPr>
+          <a:xfrm>
+            <a:off x="7845552" y="1874520"/>
+            <a:ext cx="3383280" cy="457200"/>
+          </a:xfrm>
+          <a:prstGeom prst="rect">
+            <a:avLst/>
+          </a:prstGeom>
+          <a:noFill/>
+          <a:ln/>
+        </p:spPr>
+        <p:txBody>
+          <a:bodyPr wrap="square" lIns="0" tIns="0" rIns="0" bIns="0" rtlCol="0" anchor="ctr"/>
+          <a:lstStyle/>
+          <a:p>
+            <a:pPr rtl="1" algn="r" indent="0" marL="0">
+              <a:buNone/>
+            </a:pPr>
+            <a:r>
+              <a:rPr lang="ar-SA" altLang="en-US" sz="1800" b="1" dirty="0">
+                <a:solidFill>
+                  <a:srgbClr val="FFFFFF"/>
+                </a:solidFill>
+                <a:latin typeface="Arial" pitchFamily="34" charset="0"/>
+                <a:ea typeface="Arial" pitchFamily="34" charset="-122"/>
+                <a:cs typeface="Arial" pitchFamily="34" charset="-120"/>
+              </a:rPr>
+              <a:t>تجربة مجانية</a:t>
+            </a:r>
+            <a:endParaRPr lang="ar-SA" sz="1800" dirty="0"/>
+          </a:p>
+        </p:txBody>
+      </p:sp>
+      <p:sp>
+        <p:nvSpPr>
           <p:cNvPr id="5" name="Text 3"/>
           <p:cNvSpPr txBox="1"/>
           <p:nvPr/>
         </p:nvSpPr>
         <p:spPr>
           <a:xfrm>
-            <a:off x="3383280" y="2286000"/>
-            <a:ext cx="5394960" cy="603504"/>
+            <a:off x="7845552" y="2331720"/>
+            <a:ext cx="3383280" cy="914400"/>
           </a:xfrm>
           <a:prstGeom prst="rect">
             <a:avLst/>
@@ -5899,7 +5126,7 @@
               <a:buNone/>
             </a:pPr>
             <a:r>
-              <a:rPr lang="ar-SA" altLang="en-US" sz="1500" dirty="0">
+              <a:rPr lang="ar-SA" altLang="en-US" sz="4800" b="1" dirty="0">
                 <a:solidFill>
                   <a:srgbClr val="FFFFFF"/>
                 </a:solidFill>
@@ -5907,49 +5134,200 @@
                 <a:ea typeface="Arial" pitchFamily="34" charset="-122"/>
                 <a:cs typeface="Arial" pitchFamily="34" charset="-120"/>
               </a:rPr>
-              <a:t>سؤالكم — بصياغتكم أنتم، ولو بالعامية</a:t>
-            </a:r>
-            <a:endParaRPr lang="ar-SA" sz="1500" dirty="0"/>
-          </a:p>
-        </p:txBody>
-      </p:sp>
-      <p:sp>
-        <p:nvSpPr>
-          <p:cNvPr id="6" name="Shape 4"/>
+              <a:t>٧ أيام</a:t>
+            </a:r>
+            <a:endParaRPr lang="ar-SA" sz="4800" dirty="0"/>
+          </a:p>
+        </p:txBody>
+      </p:sp>
+      <p:sp>
+        <p:nvSpPr>
+          <p:cNvPr id="6" name="Text 4"/>
+          <p:cNvSpPr txBox="1"/>
+          <p:nvPr/>
+        </p:nvSpPr>
+        <p:spPr>
+          <a:xfrm>
+            <a:off x="7845552" y="3383280"/>
+            <a:ext cx="3383280" cy="411480"/>
+          </a:xfrm>
+          <a:prstGeom prst="rect">
+            <a:avLst/>
+          </a:prstGeom>
+          <a:noFill/>
+          <a:ln/>
+        </p:spPr>
+        <p:txBody>
+          <a:bodyPr wrap="square" lIns="0" tIns="0" rIns="0" bIns="0" rtlCol="0" anchor="ctr"/>
+          <a:lstStyle/>
+          <a:p>
+            <a:pPr rtl="1" algn="r" indent="0" marL="0">
+              <a:buNone/>
+            </a:pPr>
+            <a:r>
+              <a:rPr lang="ar-SA" altLang="en-US" sz="1400" dirty="0">
+                <a:solidFill>
+                  <a:srgbClr val="FFFFFF"/>
+                </a:solidFill>
+                <a:latin typeface="Arial" pitchFamily="34" charset="0"/>
+                <a:ea typeface="Arial" pitchFamily="34" charset="-122"/>
+                <a:cs typeface="Arial" pitchFamily="34" charset="-120"/>
+              </a:rPr>
+              <a:t>✓  بلا بطاقة ائتمانية</a:t>
+            </a:r>
+            <a:endParaRPr lang="ar-SA" sz="1400" dirty="0"/>
+          </a:p>
+        </p:txBody>
+      </p:sp>
+      <p:sp>
+        <p:nvSpPr>
+          <p:cNvPr id="7" name="Text 5"/>
+          <p:cNvSpPr txBox="1"/>
+          <p:nvPr/>
+        </p:nvSpPr>
+        <p:spPr>
+          <a:xfrm>
+            <a:off x="7845552" y="3886200"/>
+            <a:ext cx="3383280" cy="411480"/>
+          </a:xfrm>
+          <a:prstGeom prst="rect">
+            <a:avLst/>
+          </a:prstGeom>
+          <a:noFill/>
+          <a:ln/>
+        </p:spPr>
+        <p:txBody>
+          <a:bodyPr wrap="square" lIns="0" tIns="0" rIns="0" bIns="0" rtlCol="0" anchor="ctr"/>
+          <a:lstStyle/>
+          <a:p>
+            <a:pPr rtl="1" algn="r" indent="0" marL="0">
+              <a:buNone/>
+            </a:pPr>
+            <a:r>
+              <a:rPr lang="ar-SA" altLang="en-US" sz="1400" dirty="0">
+                <a:solidFill>
+                  <a:srgbClr val="FFFFFF"/>
+                </a:solidFill>
+                <a:latin typeface="Arial" pitchFamily="34" charset="0"/>
+                <a:ea typeface="Arial" pitchFamily="34" charset="-122"/>
+                <a:cs typeface="Arial" pitchFamily="34" charset="-120"/>
+              </a:rPr>
+              <a:t>✓  على مستنداتكم الحقيقية</a:t>
+            </a:r>
+            <a:endParaRPr lang="ar-SA" sz="1400" dirty="0"/>
+          </a:p>
+        </p:txBody>
+      </p:sp>
+      <p:sp>
+        <p:nvSpPr>
+          <p:cNvPr id="8" name="Text 6"/>
+          <p:cNvSpPr txBox="1"/>
+          <p:nvPr/>
+        </p:nvSpPr>
+        <p:spPr>
+          <a:xfrm>
+            <a:off x="7845552" y="4389120"/>
+            <a:ext cx="3383280" cy="411480"/>
+          </a:xfrm>
+          <a:prstGeom prst="rect">
+            <a:avLst/>
+          </a:prstGeom>
+          <a:noFill/>
+          <a:ln/>
+        </p:spPr>
+        <p:txBody>
+          <a:bodyPr wrap="square" lIns="0" tIns="0" rIns="0" bIns="0" rtlCol="0" anchor="ctr"/>
+          <a:lstStyle/>
+          <a:p>
+            <a:pPr rtl="1" algn="r" indent="0" marL="0">
+              <a:buNone/>
+            </a:pPr>
+            <a:r>
+              <a:rPr lang="ar-SA" altLang="en-US" sz="1400" dirty="0">
+                <a:solidFill>
+                  <a:srgbClr val="FFFFFF"/>
+                </a:solidFill>
+                <a:latin typeface="Arial" pitchFamily="34" charset="0"/>
+                <a:ea typeface="Arial" pitchFamily="34" charset="-122"/>
+                <a:cs typeface="Arial" pitchFamily="34" charset="-120"/>
+              </a:rPr>
+              <a:t>✓  ٣ مستخدمين، و١٠ مستندات، و٥٠ سؤالًا</a:t>
+            </a:r>
+            <a:endParaRPr lang="ar-SA" sz="1400" dirty="0"/>
+          </a:p>
+        </p:txBody>
+      </p:sp>
+      <p:sp>
+        <p:nvSpPr>
+          <p:cNvPr id="9" name="Text 7"/>
+          <p:cNvSpPr txBox="1"/>
+          <p:nvPr/>
+        </p:nvSpPr>
+        <p:spPr>
+          <a:xfrm>
+            <a:off x="7845552" y="4892040"/>
+            <a:ext cx="3383280" cy="411480"/>
+          </a:xfrm>
+          <a:prstGeom prst="rect">
+            <a:avLst/>
+          </a:prstGeom>
+          <a:noFill/>
+          <a:ln/>
+        </p:spPr>
+        <p:txBody>
+          <a:bodyPr wrap="square" lIns="0" tIns="0" rIns="0" bIns="0" rtlCol="0" anchor="ctr"/>
+          <a:lstStyle/>
+          <a:p>
+            <a:pPr rtl="1" algn="r" indent="0" marL="0">
+              <a:buNone/>
+            </a:pPr>
+            <a:r>
+              <a:rPr lang="ar-SA" altLang="en-US" sz="1400" dirty="0">
+                <a:solidFill>
+                  <a:srgbClr val="FFFFFF"/>
+                </a:solidFill>
+                <a:latin typeface="Arial" pitchFamily="34" charset="0"/>
+                <a:ea typeface="Arial" pitchFamily="34" charset="-122"/>
+                <a:cs typeface="Arial" pitchFamily="34" charset="-120"/>
+              </a:rPr>
+              <a:t>✓  نجهّزها لكم في يوم عمل واحد</a:t>
+            </a:r>
+            <a:endParaRPr lang="ar-SA" sz="1400" dirty="0"/>
+          </a:p>
+        </p:txBody>
+      </p:sp>
+      <p:sp>
+        <p:nvSpPr>
+          <p:cNvPr id="10" name="Shape 8"/>
           <p:cNvSpPr/>
           <p:nvPr/>
         </p:nvSpPr>
         <p:spPr>
           <a:xfrm>
-            <a:off x="3108960" y="3108960"/>
-            <a:ext cx="5943600" cy="1600200"/>
+            <a:off x="640080" y="1645920"/>
+            <a:ext cx="6675120" cy="1188720"/>
           </a:xfrm>
           <a:prstGeom prst="roundRect">
             <a:avLst>
-              <a:gd name="adj" fmla="val 7429"/>
+              <a:gd name="adj" fmla="val 9231"/>
             </a:avLst>
           </a:prstGeom>
           <a:solidFill>
             <a:srgbClr val="EDF3F8"/>
           </a:solidFill>
-          <a:ln w="12700">
-            <a:solidFill>
-              <a:srgbClr val="2A6C9E"/>
-            </a:solidFill>
-            <a:prstDash val="solid"/>
-          </a:ln>
-        </p:spPr>
-      </p:sp>
-      <p:sp>
-        <p:nvSpPr>
-          <p:cNvPr id="7" name="Text 5"/>
-          <p:cNvSpPr txBox="1"/>
-          <p:nvPr/>
-        </p:nvSpPr>
-        <p:spPr>
-          <a:xfrm>
-            <a:off x="3383280" y="3246120"/>
-            <a:ext cx="5394960" cy="457200"/>
+          <a:ln/>
+        </p:spPr>
+      </p:sp>
+      <p:sp>
+        <p:nvSpPr>
+          <p:cNvPr id="11" name="Text 9"/>
+          <p:cNvSpPr txBox="1"/>
+          <p:nvPr/>
+        </p:nvSpPr>
+        <p:spPr>
+          <a:xfrm>
+            <a:off x="4937760" y="1810512"/>
+            <a:ext cx="2103120" cy="457200"/>
           </a:xfrm>
           <a:prstGeom prst="rect">
             <a:avLst/>
@@ -5965,7 +5343,7 @@
               <a:buNone/>
             </a:pPr>
             <a:r>
-              <a:rPr lang="ar-SA" altLang="en-US" sz="1500" b="1" dirty="0">
+              <a:rPr lang="ar-SA" altLang="en-US" sz="1700" b="1" dirty="0">
                 <a:solidFill>
                   <a:srgbClr val="1A2B3A"/>
                 </a:solidFill>
@@ -5973,22 +5351,22 @@
                 <a:ea typeface="Arial" pitchFamily="34" charset="-122"/>
                 <a:cs typeface="Arial" pitchFamily="34" charset="-120"/>
               </a:rPr>
-              <a:t>الجواب من مستندكم، لا من الإنترنت</a:t>
-            </a:r>
-            <a:endParaRPr lang="ar-SA" sz="1500" dirty="0"/>
-          </a:p>
-        </p:txBody>
-      </p:sp>
-      <p:sp>
-        <p:nvSpPr>
-          <p:cNvPr id="8" name="Text 6"/>
-          <p:cNvSpPr txBox="1"/>
-          <p:nvPr/>
-        </p:nvSpPr>
-        <p:spPr>
-          <a:xfrm>
-            <a:off x="3383280" y="3730752"/>
-            <a:ext cx="5394960" cy="411480"/>
+              <a:t>Starter</a:t>
+            </a:r>
+            <a:endParaRPr lang="ar-SA" sz="1700" dirty="0"/>
+          </a:p>
+        </p:txBody>
+      </p:sp>
+      <p:sp>
+        <p:nvSpPr>
+          <p:cNvPr id="12" name="Text 10"/>
+          <p:cNvSpPr txBox="1"/>
+          <p:nvPr/>
+        </p:nvSpPr>
+        <p:spPr>
+          <a:xfrm>
+            <a:off x="1920240" y="2267712"/>
+            <a:ext cx="5120640" cy="411480"/>
           </a:xfrm>
           <a:prstGeom prst="rect">
             <a:avLst/>
@@ -6004,7 +5382,7 @@
               <a:buNone/>
             </a:pPr>
             <a:r>
-              <a:rPr lang="ar-SA" altLang="en-US" sz="1300" dirty="0">
+              <a:rPr lang="ar-SA" altLang="en-US" sz="1250" dirty="0">
                 <a:solidFill>
                   <a:srgbClr val="5B6B7A"/>
                 </a:solidFill>
@@ -6012,65 +5390,191 @@
                 <a:ea typeface="Arial" pitchFamily="34" charset="-122"/>
                 <a:cs typeface="Arial" pitchFamily="34" charset="-120"/>
               </a:rPr>
-              <a:t>وتحته المصدر الذي تراجعونه بأنفسكم في ثلاثين ثانية:</a:t>
-            </a:r>
-            <a:endParaRPr lang="ar-SA" sz="1300" dirty="0"/>
-          </a:p>
-        </p:txBody>
-      </p:sp>
-      <p:sp>
-        <p:nvSpPr>
-          <p:cNvPr id="9" name="Shape 7"/>
+              <a:t>١٠ مستخدمين، و٦٠٠ سؤال شهريًا</a:t>
+            </a:r>
+            <a:endParaRPr lang="ar-SA" sz="1250" dirty="0"/>
+          </a:p>
+        </p:txBody>
+      </p:sp>
+      <p:sp>
+        <p:nvSpPr>
+          <p:cNvPr id="13" name="Text 11"/>
+          <p:cNvSpPr txBox="1"/>
+          <p:nvPr/>
+        </p:nvSpPr>
+        <p:spPr>
+          <a:xfrm>
+            <a:off x="914400" y="1920240"/>
+            <a:ext cx="2926080" cy="640080"/>
+          </a:xfrm>
+          <a:prstGeom prst="rect">
+            <a:avLst/>
+          </a:prstGeom>
+          <a:noFill/>
+          <a:ln/>
+        </p:spPr>
+        <p:txBody>
+          <a:bodyPr wrap="square" lIns="0" tIns="0" rIns="0" bIns="0" rtlCol="0" anchor="ctr"/>
+          <a:lstStyle/>
+          <a:p>
+            <a:pPr algn="l" indent="0" marL="0">
+              <a:buNone/>
+            </a:pPr>
+            <a:r>
+              <a:rPr lang="ar-SA" altLang="en-US" sz="2600" b="1" dirty="0">
+                <a:solidFill>
+                  <a:srgbClr val="1E5075"/>
+                </a:solidFill>
+                <a:latin typeface="Arial" pitchFamily="34" charset="0"/>
+                <a:ea typeface="Arial" pitchFamily="34" charset="-122"/>
+                <a:cs typeface="Arial" pitchFamily="34" charset="-120"/>
+              </a:rPr>
+              <a:t>899</a:t>
+            </a:r>
+            <a:pPr algn="l" indent="0" marL="0">
+              <a:buNone/>
+            </a:pPr>
+            <a:r>
+              <a:rPr lang="ar-SA" altLang="en-US" sz="1200" dirty="0">
+                <a:solidFill>
+                  <a:srgbClr val="5B6B7A"/>
+                </a:solidFill>
+                <a:latin typeface="Arial" pitchFamily="34" charset="0"/>
+                <a:ea typeface="Arial" pitchFamily="34" charset="-122"/>
+                <a:cs typeface="Arial" pitchFamily="34" charset="-120"/>
+              </a:rPr>
+              <a:t>  ريال/شهر</a:t>
+            </a:r>
+            <a:endParaRPr lang="ar-SA" sz="2600" dirty="0"/>
+          </a:p>
+        </p:txBody>
+      </p:sp>
+      <p:sp>
+        <p:nvSpPr>
+          <p:cNvPr id="14" name="Shape 12"/>
           <p:cNvSpPr/>
           <p:nvPr/>
         </p:nvSpPr>
         <p:spPr>
           <a:xfrm>
-            <a:off x="3383280" y="4160520"/>
-            <a:ext cx="2926080" cy="384048"/>
+            <a:off x="640080" y="3017520"/>
+            <a:ext cx="6675120" cy="1188720"/>
           </a:xfrm>
           <a:prstGeom prst="roundRect">
             <a:avLst>
-              <a:gd name="adj" fmla="val 50000"/>
+              <a:gd name="adj" fmla="val 9231"/>
             </a:avLst>
           </a:prstGeom>
           <a:solidFill>
             <a:srgbClr val="EDF3F8"/>
           </a:solidFill>
-          <a:ln w="9525">
-            <a:solidFill>
-              <a:srgbClr val="2A6C9E"/>
-            </a:solidFill>
-            <a:prstDash val="solid"/>
-          </a:ln>
-        </p:spPr>
-      </p:sp>
-      <p:sp>
-        <p:nvSpPr>
-          <p:cNvPr id="10" name="Text 8"/>
-          <p:cNvSpPr txBox="1"/>
-          <p:nvPr/>
-        </p:nvSpPr>
-        <p:spPr>
-          <a:xfrm>
-            <a:off x="3383280" y="4160520"/>
-            <a:ext cx="2926080" cy="384048"/>
-          </a:xfrm>
-          <a:prstGeom prst="rect">
-            <a:avLst/>
-          </a:prstGeom>
-          <a:noFill/>
-          <a:ln/>
-        </p:spPr>
-        <p:txBody>
-          <a:bodyPr wrap="square" lIns="0" tIns="0" rIns="0" bIns="0" rtlCol="0" anchor="ctr"/>
-          <a:lstStyle/>
-          <a:p>
-            <a:pPr rtl="1" algn="ctr" indent="0" marL="0">
-              <a:buNone/>
-            </a:pPr>
-            <a:r>
-              <a:rPr lang="ar-SA" altLang="en-US" sz="1150" b="1" dirty="0">
+          <a:ln/>
+        </p:spPr>
+      </p:sp>
+      <p:sp>
+        <p:nvSpPr>
+          <p:cNvPr id="15" name="Text 13"/>
+          <p:cNvSpPr txBox="1"/>
+          <p:nvPr/>
+        </p:nvSpPr>
+        <p:spPr>
+          <a:xfrm>
+            <a:off x="4937760" y="3182112"/>
+            <a:ext cx="2103120" cy="457200"/>
+          </a:xfrm>
+          <a:prstGeom prst="rect">
+            <a:avLst/>
+          </a:prstGeom>
+          <a:noFill/>
+          <a:ln/>
+        </p:spPr>
+        <p:txBody>
+          <a:bodyPr wrap="square" lIns="0" tIns="0" rIns="0" bIns="0" rtlCol="0" anchor="ctr"/>
+          <a:lstStyle/>
+          <a:p>
+            <a:pPr rtl="1" algn="r" indent="0" marL="0">
+              <a:buNone/>
+            </a:pPr>
+            <a:r>
+              <a:rPr lang="ar-SA" altLang="en-US" sz="1700" b="1" dirty="0">
+                <a:solidFill>
+                  <a:srgbClr val="1A2B3A"/>
+                </a:solidFill>
+                <a:latin typeface="Arial" pitchFamily="34" charset="0"/>
+                <a:ea typeface="Arial" pitchFamily="34" charset="-122"/>
+                <a:cs typeface="Arial" pitchFamily="34" charset="-120"/>
+              </a:rPr>
+              <a:t>Growth</a:t>
+            </a:r>
+            <a:endParaRPr lang="ar-SA" sz="1700" dirty="0"/>
+          </a:p>
+        </p:txBody>
+      </p:sp>
+      <p:sp>
+        <p:nvSpPr>
+          <p:cNvPr id="16" name="Text 14"/>
+          <p:cNvSpPr txBox="1"/>
+          <p:nvPr/>
+        </p:nvSpPr>
+        <p:spPr>
+          <a:xfrm>
+            <a:off x="1920240" y="3639312"/>
+            <a:ext cx="5120640" cy="411480"/>
+          </a:xfrm>
+          <a:prstGeom prst="rect">
+            <a:avLst/>
+          </a:prstGeom>
+          <a:noFill/>
+          <a:ln/>
+        </p:spPr>
+        <p:txBody>
+          <a:bodyPr wrap="square" lIns="0" tIns="0" rIns="0" bIns="0" rtlCol="0" anchor="ctr"/>
+          <a:lstStyle/>
+          <a:p>
+            <a:pPr rtl="1" algn="r" indent="0" marL="0">
+              <a:buNone/>
+            </a:pPr>
+            <a:r>
+              <a:rPr lang="ar-SA" altLang="en-US" sz="1250" dirty="0">
+                <a:solidFill>
+                  <a:srgbClr val="5B6B7A"/>
+                </a:solidFill>
+                <a:latin typeface="Arial" pitchFamily="34" charset="0"/>
+                <a:ea typeface="Arial" pitchFamily="34" charset="-122"/>
+                <a:cs typeface="Arial" pitchFamily="34" charset="-120"/>
+              </a:rPr>
+              <a:t>٣٠ مستخدمًا، و٢٬٠٠٠ سؤال شهريًا</a:t>
+            </a:r>
+            <a:endParaRPr lang="ar-SA" sz="1250" dirty="0"/>
+          </a:p>
+        </p:txBody>
+      </p:sp>
+      <p:sp>
+        <p:nvSpPr>
+          <p:cNvPr id="17" name="Text 15"/>
+          <p:cNvSpPr txBox="1"/>
+          <p:nvPr/>
+        </p:nvSpPr>
+        <p:spPr>
+          <a:xfrm>
+            <a:off x="914400" y="3291840"/>
+            <a:ext cx="2926080" cy="640080"/>
+          </a:xfrm>
+          <a:prstGeom prst="rect">
+            <a:avLst/>
+          </a:prstGeom>
+          <a:noFill/>
+          <a:ln/>
+        </p:spPr>
+        <p:txBody>
+          <a:bodyPr wrap="square" lIns="0" tIns="0" rIns="0" bIns="0" rtlCol="0" anchor="ctr"/>
+          <a:lstStyle/>
+          <a:p>
+            <a:pPr algn="l" indent="0" marL="0">
+              <a:buNone/>
+            </a:pPr>
+            <a:r>
+              <a:rPr lang="ar-SA" altLang="en-US" sz="2600" b="1" dirty="0">
                 <a:solidFill>
                   <a:srgbClr val="1E5075"/>
                 </a:solidFill>
@@ -6078,48 +5582,215 @@
                 <a:ea typeface="Arial" pitchFamily="34" charset="-122"/>
                 <a:cs typeface="Arial" pitchFamily="34" charset="-120"/>
               </a:rPr>
-              <a:t>لائحتكم · الصفحة · درجة الثقة</a:t>
+              <a:t>2,499</a:t>
+            </a:r>
+            <a:pPr algn="l" indent="0" marL="0">
+              <a:buNone/>
+            </a:pPr>
+            <a:r>
+              <a:rPr lang="ar-SA" altLang="en-US" sz="1200" dirty="0">
+                <a:solidFill>
+                  <a:srgbClr val="5B6B7A"/>
+                </a:solidFill>
+                <a:latin typeface="Arial" pitchFamily="34" charset="0"/>
+                <a:ea typeface="Arial" pitchFamily="34" charset="-122"/>
+                <a:cs typeface="Arial" pitchFamily="34" charset="-120"/>
+              </a:rPr>
+              <a:t>  ريال/شهر</a:t>
+            </a:r>
+            <a:endParaRPr lang="ar-SA" sz="2600" dirty="0"/>
+          </a:p>
+        </p:txBody>
+      </p:sp>
+      <p:sp>
+        <p:nvSpPr>
+          <p:cNvPr id="18" name="Shape 16"/>
+          <p:cNvSpPr/>
+          <p:nvPr/>
+        </p:nvSpPr>
+        <p:spPr>
+          <a:xfrm>
+            <a:off x="640080" y="4389120"/>
+            <a:ext cx="6675120" cy="1188720"/>
+          </a:xfrm>
+          <a:prstGeom prst="roundRect">
+            <a:avLst>
+              <a:gd name="adj" fmla="val 9231"/>
+            </a:avLst>
+          </a:prstGeom>
+          <a:solidFill>
+            <a:srgbClr val="EDF3F8"/>
+          </a:solidFill>
+          <a:ln/>
+        </p:spPr>
+      </p:sp>
+      <p:sp>
+        <p:nvSpPr>
+          <p:cNvPr id="19" name="Text 17"/>
+          <p:cNvSpPr txBox="1"/>
+          <p:nvPr/>
+        </p:nvSpPr>
+        <p:spPr>
+          <a:xfrm>
+            <a:off x="4937760" y="4553712"/>
+            <a:ext cx="2103120" cy="457200"/>
+          </a:xfrm>
+          <a:prstGeom prst="rect">
+            <a:avLst/>
+          </a:prstGeom>
+          <a:noFill/>
+          <a:ln/>
+        </p:spPr>
+        <p:txBody>
+          <a:bodyPr wrap="square" lIns="0" tIns="0" rIns="0" bIns="0" rtlCol="0" anchor="ctr"/>
+          <a:lstStyle/>
+          <a:p>
+            <a:pPr rtl="1" algn="r" indent="0" marL="0">
+              <a:buNone/>
+            </a:pPr>
+            <a:r>
+              <a:rPr lang="ar-SA" altLang="en-US" sz="1700" b="1" dirty="0">
+                <a:solidFill>
+                  <a:srgbClr val="1A2B3A"/>
+                </a:solidFill>
+                <a:latin typeface="Arial" pitchFamily="34" charset="0"/>
+                <a:ea typeface="Arial" pitchFamily="34" charset="-122"/>
+                <a:cs typeface="Arial" pitchFamily="34" charset="-120"/>
+              </a:rPr>
+              <a:t>Business</a:t>
+            </a:r>
+            <a:endParaRPr lang="ar-SA" sz="1700" dirty="0"/>
+          </a:p>
+        </p:txBody>
+      </p:sp>
+      <p:sp>
+        <p:nvSpPr>
+          <p:cNvPr id="20" name="Text 18"/>
+          <p:cNvSpPr txBox="1"/>
+          <p:nvPr/>
+        </p:nvSpPr>
+        <p:spPr>
+          <a:xfrm>
+            <a:off x="1920240" y="5010912"/>
+            <a:ext cx="5120640" cy="411480"/>
+          </a:xfrm>
+          <a:prstGeom prst="rect">
+            <a:avLst/>
+          </a:prstGeom>
+          <a:noFill/>
+          <a:ln/>
+        </p:spPr>
+        <p:txBody>
+          <a:bodyPr wrap="square" lIns="0" tIns="0" rIns="0" bIns="0" rtlCol="0" anchor="ctr"/>
+          <a:lstStyle/>
+          <a:p>
+            <a:pPr rtl="1" algn="r" indent="0" marL="0">
+              <a:buNone/>
+            </a:pPr>
+            <a:r>
+              <a:rPr lang="ar-SA" altLang="en-US" sz="1250" dirty="0">
+                <a:solidFill>
+                  <a:srgbClr val="5B6B7A"/>
+                </a:solidFill>
+                <a:latin typeface="Arial" pitchFamily="34" charset="0"/>
+                <a:ea typeface="Arial" pitchFamily="34" charset="-122"/>
+                <a:cs typeface="Arial" pitchFamily="34" charset="-120"/>
+              </a:rPr>
+              <a:t>٧٥ مستخدمًا، و٦٬٠٠٠ سؤال شهريًا</a:t>
+            </a:r>
+            <a:endParaRPr lang="ar-SA" sz="1250" dirty="0"/>
+          </a:p>
+        </p:txBody>
+      </p:sp>
+      <p:sp>
+        <p:nvSpPr>
+          <p:cNvPr id="21" name="Text 19"/>
+          <p:cNvSpPr txBox="1"/>
+          <p:nvPr/>
+        </p:nvSpPr>
+        <p:spPr>
+          <a:xfrm>
+            <a:off x="914400" y="4663440"/>
+            <a:ext cx="2926080" cy="640080"/>
+          </a:xfrm>
+          <a:prstGeom prst="rect">
+            <a:avLst/>
+          </a:prstGeom>
+          <a:noFill/>
+          <a:ln/>
+        </p:spPr>
+        <p:txBody>
+          <a:bodyPr wrap="square" lIns="0" tIns="0" rIns="0" bIns="0" rtlCol="0" anchor="ctr"/>
+          <a:lstStyle/>
+          <a:p>
+            <a:pPr algn="l" indent="0" marL="0">
+              <a:buNone/>
+            </a:pPr>
+            <a:r>
+              <a:rPr lang="ar-SA" altLang="en-US" sz="2600" b="1" dirty="0">
+                <a:solidFill>
+                  <a:srgbClr val="1E5075"/>
+                </a:solidFill>
+                <a:latin typeface="Arial" pitchFamily="34" charset="0"/>
+                <a:ea typeface="Arial" pitchFamily="34" charset="-122"/>
+                <a:cs typeface="Arial" pitchFamily="34" charset="-120"/>
+              </a:rPr>
+              <a:t>5,999</a:t>
+            </a:r>
+            <a:pPr algn="l" indent="0" marL="0">
+              <a:buNone/>
+            </a:pPr>
+            <a:r>
+              <a:rPr lang="ar-SA" altLang="en-US" sz="1200" dirty="0">
+                <a:solidFill>
+                  <a:srgbClr val="5B6B7A"/>
+                </a:solidFill>
+                <a:latin typeface="Arial" pitchFamily="34" charset="0"/>
+                <a:ea typeface="Arial" pitchFamily="34" charset="-122"/>
+                <a:cs typeface="Arial" pitchFamily="34" charset="-120"/>
+              </a:rPr>
+              <a:t>  ريال/شهر</a:t>
+            </a:r>
+            <a:endParaRPr lang="ar-SA" sz="2600" dirty="0"/>
+          </a:p>
+        </p:txBody>
+      </p:sp>
+      <p:sp>
+        <p:nvSpPr>
+          <p:cNvPr id="22" name="Text 20"/>
+          <p:cNvSpPr txBox="1"/>
+          <p:nvPr/>
+        </p:nvSpPr>
+        <p:spPr>
+          <a:xfrm>
+            <a:off x="640080" y="5806440"/>
+            <a:ext cx="10908792" cy="411480"/>
+          </a:xfrm>
+          <a:prstGeom prst="rect">
+            <a:avLst/>
+          </a:prstGeom>
+          <a:noFill/>
+          <a:ln/>
+        </p:spPr>
+        <p:txBody>
+          <a:bodyPr wrap="square" lIns="0" tIns="0" rIns="0" bIns="0" rtlCol="0" anchor="ctr"/>
+          <a:lstStyle/>
+          <a:p>
+            <a:pPr rtl="1" algn="r" indent="0" marL="0">
+              <a:buNone/>
+            </a:pPr>
+            <a:r>
+              <a:rPr lang="ar-SA" altLang="en-US" sz="1150" dirty="0">
+                <a:solidFill>
+                  <a:srgbClr val="5B6B7A"/>
+                </a:solidFill>
+                <a:latin typeface="Arial" pitchFamily="34" charset="0"/>
+                <a:ea typeface="Arial" pitchFamily="34" charset="-122"/>
+                <a:cs typeface="Arial" pitchFamily="34" charset="-120"/>
+              </a:rPr>
+              <a:t>الأسعار لا تشمل ضريبة القيمة المضافة · بلا رسوم تأسيس · الحدود قابلة للتخصيص للجهات الكبيرة</a:t>
             </a:r>
             <a:endParaRPr lang="ar-SA" sz="1150" dirty="0"/>
-          </a:p>
-        </p:txBody>
-      </p:sp>
-      <p:sp>
-        <p:nvSpPr>
-          <p:cNvPr id="11" name="Text 9"/>
-          <p:cNvSpPr txBox="1"/>
-          <p:nvPr/>
-        </p:nvSpPr>
-        <p:spPr>
-          <a:xfrm>
-            <a:off x="640080" y="5212080"/>
-            <a:ext cx="10908792" cy="548640"/>
-          </a:xfrm>
-          <a:prstGeom prst="rect">
-            <a:avLst/>
-          </a:prstGeom>
-          <a:noFill/>
-          <a:ln/>
-        </p:spPr>
-        <p:txBody>
-          <a:bodyPr wrap="square" lIns="0" tIns="0" rIns="0" bIns="0" rtlCol="0" anchor="ctr"/>
-          <a:lstStyle/>
-          <a:p>
-            <a:pPr rtl="1" algn="r" indent="0" marL="0">
-              <a:buNone/>
-            </a:pPr>
-            <a:r>
-              <a:rPr lang="ar-SA" altLang="en-US" sz="1550" b="1" dirty="0">
-                <a:solidFill>
-                  <a:srgbClr val="1E5075"/>
-                </a:solidFill>
-                <a:latin typeface="Arial" pitchFamily="34" charset="0"/>
-                <a:ea typeface="Arial" pitchFamily="34" charset="-122"/>
-                <a:cs typeface="Arial" pitchFamily="34" charset="-120"/>
-              </a:rPr>
-              <a:t>اختبروه بسؤالٍ تعرفون جوابه — وبسؤالٍ تعرفون أن لا جواب له في الملف. الثاني أهم.</a:t>
-            </a:r>
-            <a:endParaRPr lang="ar-SA" sz="1550" dirty="0"/>
           </a:p>
         </p:txBody>
       </p:sp>
@@ -6188,7 +5859,7 @@
                 <a:ea typeface="Arial" pitchFamily="34" charset="-122"/>
                 <a:cs typeface="Arial" pitchFamily="34" charset="-120"/>
               </a:rPr>
-              <a:t>ابدؤوا بتجربة — بلا بطاقة وبلا التزام</a:t>
+              <a:t>غدًا — تكون جاهزةً عندكم</a:t>
             </a:r>
             <a:endParaRPr lang="ar-SA" sz="3200" dirty="0"/>
           </a:p>
@@ -6202,13 +5873,33 @@
         </p:nvSpPr>
         <p:spPr>
           <a:xfrm>
-            <a:off x="7525512" y="1645920"/>
-            <a:ext cx="4023360" cy="3931920"/>
+            <a:off x="8028432" y="1828800"/>
+            <a:ext cx="3520440" cy="3017520"/>
           </a:xfrm>
           <a:prstGeom prst="roundRect">
             <a:avLst>
-              <a:gd name="adj" fmla="val 3256"/>
+              <a:gd name="adj" fmla="val 3636"/>
             </a:avLst>
+          </a:prstGeom>
+          <a:solidFill>
+            <a:srgbClr val="EDF3F8"/>
+          </a:solidFill>
+          <a:ln/>
+        </p:spPr>
+      </p:sp>
+      <p:sp>
+        <p:nvSpPr>
+          <p:cNvPr id="4" name="Shape 2"/>
+          <p:cNvSpPr/>
+          <p:nvPr/>
+        </p:nvSpPr>
+        <p:spPr>
+          <a:xfrm>
+            <a:off x="10588752" y="2103120"/>
+            <a:ext cx="640080" cy="640080"/>
+          </a:xfrm>
+          <a:prstGeom prst="ellipse">
+            <a:avLst/>
           </a:prstGeom>
           <a:solidFill>
             <a:srgbClr val="2A6C9E"/>
@@ -6218,14 +5909,97 @@
       </p:sp>
       <p:sp>
         <p:nvSpPr>
-          <p:cNvPr id="4" name="Text 2"/>
-          <p:cNvSpPr txBox="1"/>
-          <p:nvPr/>
-        </p:nvSpPr>
-        <p:spPr>
-          <a:xfrm>
-            <a:off x="7845552" y="1874520"/>
-            <a:ext cx="3383280" cy="457200"/>
+          <p:cNvPr id="5" name="Text 3"/>
+          <p:cNvSpPr txBox="1"/>
+          <p:nvPr/>
+        </p:nvSpPr>
+        <p:spPr>
+          <a:xfrm>
+            <a:off x="10588752" y="2103120"/>
+            <a:ext cx="640080" cy="640080"/>
+          </a:xfrm>
+          <a:prstGeom prst="rect">
+            <a:avLst/>
+          </a:prstGeom>
+          <a:noFill/>
+          <a:ln/>
+        </p:spPr>
+        <p:txBody>
+          <a:bodyPr wrap="square" lIns="0" tIns="0" rIns="0" bIns="0" rtlCol="0" anchor="ctr"/>
+          <a:lstStyle/>
+          <a:p>
+            <a:pPr rtl="1" algn="ctr" indent="0" marL="0">
+              <a:buNone/>
+            </a:pPr>
+            <a:r>
+              <a:rPr lang="ar-SA" altLang="en-US" sz="2000" b="1" dirty="0">
+                <a:solidFill>
+                  <a:srgbClr val="FFFFFF"/>
+                </a:solidFill>
+                <a:latin typeface="Arial" pitchFamily="34" charset="0"/>
+                <a:ea typeface="Arial" pitchFamily="34" charset="-122"/>
+                <a:cs typeface="Arial" pitchFamily="34" charset="-120"/>
+              </a:rPr>
+              <a:t>١</a:t>
+            </a:r>
+            <a:endParaRPr lang="ar-SA" sz="2000" dirty="0"/>
+          </a:p>
+        </p:txBody>
+      </p:sp>
+      <p:sp>
+        <p:nvSpPr>
+          <p:cNvPr id="6" name="Shape 4"/>
+          <p:cNvSpPr/>
+          <p:nvPr/>
+        </p:nvSpPr>
+        <p:spPr>
+          <a:xfrm>
+            <a:off x="8302752" y="2103120"/>
+            <a:ext cx="640080" cy="640080"/>
+          </a:xfrm>
+          <a:prstGeom prst="ellipse">
+            <a:avLst/>
+          </a:prstGeom>
+          <a:solidFill>
+            <a:srgbClr val="FFFFFF"/>
+          </a:solidFill>
+          <a:ln/>
+        </p:spPr>
+      </p:sp>
+      <p:pic>
+        <p:nvPicPr>
+          <p:cNvPr id="7" name="Image 0" descr="preencoded.png">    </p:cNvPr>
+          <p:cNvPicPr>
+            <a:picLocks noChangeAspect="1"/>
+          </p:cNvPicPr>
+          <p:nvPr/>
+        </p:nvPicPr>
+        <p:blipFill>
+          <a:blip r:embed="rId1"/>
+          <a:stretch>
+            <a:fillRect/>
+          </a:stretch>
+        </p:blipFill>
+        <p:spPr>
+          <a:xfrm>
+            <a:off x="8469173" y="2269541"/>
+            <a:ext cx="307238" cy="307238"/>
+          </a:xfrm>
+          <a:prstGeom prst="rect">
+            <a:avLst/>
+          </a:prstGeom>
+        </p:spPr>
+      </p:pic>
+      <p:sp>
+        <p:nvSpPr>
+          <p:cNvPr id="8" name="Text 5"/>
+          <p:cNvSpPr txBox="1"/>
+          <p:nvPr/>
+        </p:nvSpPr>
+        <p:spPr>
+          <a:xfrm>
+            <a:off x="8302752" y="2971800"/>
+            <a:ext cx="2971800" cy="502920"/>
           </a:xfrm>
           <a:prstGeom prst="rect">
             <a:avLst/>
@@ -6243,13 +6017,13 @@
             <a:r>
               <a:rPr lang="ar-SA" altLang="en-US" sz="1800" b="1" dirty="0">
                 <a:solidFill>
-                  <a:srgbClr val="FFFFFF"/>
-                </a:solidFill>
-                <a:latin typeface="Arial" pitchFamily="34" charset="0"/>
-                <a:ea typeface="Arial" pitchFamily="34" charset="-122"/>
-                <a:cs typeface="Arial" pitchFamily="34" charset="-120"/>
-              </a:rPr>
-              <a:t>تجربة مجانية</a:t>
+                  <a:srgbClr val="1A2B3A"/>
+                </a:solidFill>
+                <a:latin typeface="Arial" pitchFamily="34" charset="0"/>
+                <a:ea typeface="Arial" pitchFamily="34" charset="-122"/>
+                <a:cs typeface="Arial" pitchFamily="34" charset="-120"/>
+              </a:rPr>
+              <a:t>لائحة واحدة</a:t>
             </a:r>
             <a:endParaRPr lang="ar-SA" sz="1800" dirty="0"/>
           </a:p>
@@ -6257,14 +6031,14 @@
       </p:sp>
       <p:sp>
         <p:nvSpPr>
-          <p:cNvPr id="5" name="Text 3"/>
-          <p:cNvSpPr txBox="1"/>
-          <p:nvPr/>
-        </p:nvSpPr>
-        <p:spPr>
-          <a:xfrm>
-            <a:off x="7845552" y="2331720"/>
-            <a:ext cx="3383280" cy="914400"/>
+          <p:cNvPr id="9" name="Text 6"/>
+          <p:cNvSpPr txBox="1"/>
+          <p:nvPr/>
+        </p:nvSpPr>
+        <p:spPr>
+          <a:xfrm>
+            <a:off x="8302752" y="3520440"/>
+            <a:ext cx="2971800" cy="1188720"/>
           </a:xfrm>
           <a:prstGeom prst="rect">
             <a:avLst/>
@@ -6277,193 +6051,40 @@
           <a:lstStyle/>
           <a:p>
             <a:pPr rtl="1" algn="r" indent="0" marL="0">
-              <a:buNone/>
-            </a:pPr>
-            <a:r>
-              <a:rPr lang="ar-SA" altLang="en-US" sz="4800" b="1" dirty="0">
-                <a:solidFill>
-                  <a:srgbClr val="FFFFFF"/>
-                </a:solidFill>
-                <a:latin typeface="Arial" pitchFamily="34" charset="0"/>
-                <a:ea typeface="Arial" pitchFamily="34" charset="-122"/>
-                <a:cs typeface="Arial" pitchFamily="34" charset="-120"/>
-              </a:rPr>
-              <a:t>٧ أيام</a:t>
-            </a:r>
-            <a:endParaRPr lang="ar-SA" sz="4800" dirty="0"/>
-          </a:p>
-        </p:txBody>
-      </p:sp>
-      <p:sp>
-        <p:nvSpPr>
-          <p:cNvPr id="6" name="Text 4"/>
-          <p:cNvSpPr txBox="1"/>
-          <p:nvPr/>
-        </p:nvSpPr>
-        <p:spPr>
-          <a:xfrm>
-            <a:off x="7845552" y="3383280"/>
-            <a:ext cx="3383280" cy="411480"/>
-          </a:xfrm>
-          <a:prstGeom prst="rect">
-            <a:avLst/>
-          </a:prstGeom>
-          <a:noFill/>
-          <a:ln/>
-        </p:spPr>
-        <p:txBody>
-          <a:bodyPr wrap="square" lIns="0" tIns="0" rIns="0" bIns="0" rtlCol="0" anchor="ctr"/>
-          <a:lstStyle/>
-          <a:p>
-            <a:pPr rtl="1" algn="r" indent="0" marL="0">
-              <a:buNone/>
-            </a:pPr>
-            <a:r>
-              <a:rPr lang="ar-SA" altLang="en-US" sz="1400" dirty="0">
-                <a:solidFill>
-                  <a:srgbClr val="FFFFFF"/>
-                </a:solidFill>
-                <a:latin typeface="Arial" pitchFamily="34" charset="0"/>
-                <a:ea typeface="Arial" pitchFamily="34" charset="-122"/>
-                <a:cs typeface="Arial" pitchFamily="34" charset="-120"/>
-              </a:rPr>
-              <a:t>✓  بلا بطاقة ائتمانية</a:t>
-            </a:r>
-            <a:endParaRPr lang="ar-SA" sz="1400" dirty="0"/>
-          </a:p>
-        </p:txBody>
-      </p:sp>
-      <p:sp>
-        <p:nvSpPr>
-          <p:cNvPr id="7" name="Text 5"/>
-          <p:cNvSpPr txBox="1"/>
-          <p:nvPr/>
-        </p:nvSpPr>
-        <p:spPr>
-          <a:xfrm>
-            <a:off x="7845552" y="3886200"/>
-            <a:ext cx="3383280" cy="411480"/>
-          </a:xfrm>
-          <a:prstGeom prst="rect">
-            <a:avLst/>
-          </a:prstGeom>
-          <a:noFill/>
-          <a:ln/>
-        </p:spPr>
-        <p:txBody>
-          <a:bodyPr wrap="square" lIns="0" tIns="0" rIns="0" bIns="0" rtlCol="0" anchor="ctr"/>
-          <a:lstStyle/>
-          <a:p>
-            <a:pPr rtl="1" algn="r" indent="0" marL="0">
-              <a:buNone/>
-            </a:pPr>
-            <a:r>
-              <a:rPr lang="ar-SA" altLang="en-US" sz="1400" dirty="0">
-                <a:solidFill>
-                  <a:srgbClr val="FFFFFF"/>
-                </a:solidFill>
-                <a:latin typeface="Arial" pitchFamily="34" charset="0"/>
-                <a:ea typeface="Arial" pitchFamily="34" charset="-122"/>
-                <a:cs typeface="Arial" pitchFamily="34" charset="-120"/>
-              </a:rPr>
-              <a:t>✓  على مستنداتكم الحقيقية</a:t>
-            </a:r>
-            <a:endParaRPr lang="ar-SA" sz="1400" dirty="0"/>
-          </a:p>
-        </p:txBody>
-      </p:sp>
-      <p:sp>
-        <p:nvSpPr>
-          <p:cNvPr id="8" name="Text 6"/>
-          <p:cNvSpPr txBox="1"/>
-          <p:nvPr/>
-        </p:nvSpPr>
-        <p:spPr>
-          <a:xfrm>
-            <a:off x="7845552" y="4389120"/>
-            <a:ext cx="3383280" cy="411480"/>
-          </a:xfrm>
-          <a:prstGeom prst="rect">
-            <a:avLst/>
-          </a:prstGeom>
-          <a:noFill/>
-          <a:ln/>
-        </p:spPr>
-        <p:txBody>
-          <a:bodyPr wrap="square" lIns="0" tIns="0" rIns="0" bIns="0" rtlCol="0" anchor="ctr"/>
-          <a:lstStyle/>
-          <a:p>
-            <a:pPr rtl="1" algn="r" indent="0" marL="0">
-              <a:buNone/>
-            </a:pPr>
-            <a:r>
-              <a:rPr lang="ar-SA" altLang="en-US" sz="1400" dirty="0">
-                <a:solidFill>
-                  <a:srgbClr val="FFFFFF"/>
-                </a:solidFill>
-                <a:latin typeface="Arial" pitchFamily="34" charset="0"/>
-                <a:ea typeface="Arial" pitchFamily="34" charset="-122"/>
-                <a:cs typeface="Arial" pitchFamily="34" charset="-120"/>
-              </a:rPr>
-              <a:t>✓  ٣ مستخدمين، و١٠ مستندات، و٥٠ سؤالًا</a:t>
-            </a:r>
-            <a:endParaRPr lang="ar-SA" sz="1400" dirty="0"/>
-          </a:p>
-        </p:txBody>
-      </p:sp>
-      <p:sp>
-        <p:nvSpPr>
-          <p:cNvPr id="9" name="Text 7"/>
-          <p:cNvSpPr txBox="1"/>
-          <p:nvPr/>
-        </p:nvSpPr>
-        <p:spPr>
-          <a:xfrm>
-            <a:off x="7845552" y="4892040"/>
-            <a:ext cx="3383280" cy="411480"/>
-          </a:xfrm>
-          <a:prstGeom prst="rect">
-            <a:avLst/>
-          </a:prstGeom>
-          <a:noFill/>
-          <a:ln/>
-        </p:spPr>
-        <p:txBody>
-          <a:bodyPr wrap="square" lIns="0" tIns="0" rIns="0" bIns="0" rtlCol="0" anchor="ctr"/>
-          <a:lstStyle/>
-          <a:p>
-            <a:pPr rtl="1" algn="r" indent="0" marL="0">
-              <a:buNone/>
-            </a:pPr>
-            <a:r>
-              <a:rPr lang="ar-SA" altLang="en-US" sz="1400" dirty="0">
-                <a:solidFill>
-                  <a:srgbClr val="FFFFFF"/>
-                </a:solidFill>
-                <a:latin typeface="Arial" pitchFamily="34" charset="0"/>
-                <a:ea typeface="Arial" pitchFamily="34" charset="-122"/>
-                <a:cs typeface="Arial" pitchFamily="34" charset="-120"/>
-              </a:rPr>
-              <a:t>✓  نجهّزها لكم في يوم عمل واحد</a:t>
-            </a:r>
-            <a:endParaRPr lang="ar-SA" sz="1400" dirty="0"/>
-          </a:p>
-        </p:txBody>
-      </p:sp>
-      <p:sp>
-        <p:nvSpPr>
-          <p:cNvPr id="10" name="Shape 8"/>
+              <a:lnSpc>
+                <a:spcPct val="125000"/>
+              </a:lnSpc>
+              <a:buNone/>
+            </a:pPr>
+            <a:r>
+              <a:rPr lang="ar-SA" altLang="en-US" sz="1300" dirty="0">
+                <a:solidFill>
+                  <a:srgbClr val="5B6B7A"/>
+                </a:solidFill>
+                <a:latin typeface="Arial" pitchFamily="34" charset="0"/>
+                <a:ea typeface="Arial" pitchFamily="34" charset="-122"/>
+                <a:cs typeface="Arial" pitchFamily="34" charset="-120"/>
+              </a:rPr>
+              <a:t>PDF أو Word — أي وثيقة يسأل عنها فريقكم كثيرًا</a:t>
+            </a:r>
+            <a:endParaRPr lang="ar-SA" sz="1300" dirty="0"/>
+          </a:p>
+        </p:txBody>
+      </p:sp>
+      <p:sp>
+        <p:nvSpPr>
+          <p:cNvPr id="10" name="Shape 7"/>
           <p:cNvSpPr/>
           <p:nvPr/>
         </p:nvSpPr>
         <p:spPr>
           <a:xfrm>
-            <a:off x="640080" y="1645920"/>
-            <a:ext cx="6675120" cy="1188720"/>
+            <a:off x="4187952" y="1828800"/>
+            <a:ext cx="3520440" cy="3017520"/>
           </a:xfrm>
           <a:prstGeom prst="roundRect">
             <a:avLst>
-              <a:gd name="adj" fmla="val 9231"/>
+              <a:gd name="adj" fmla="val 3636"/>
             </a:avLst>
           </a:prstGeom>
           <a:solidFill>
@@ -6474,14 +6095,117 @@
       </p:sp>
       <p:sp>
         <p:nvSpPr>
-          <p:cNvPr id="11" name="Text 9"/>
-          <p:cNvSpPr txBox="1"/>
-          <p:nvPr/>
-        </p:nvSpPr>
-        <p:spPr>
-          <a:xfrm>
-            <a:off x="4937760" y="1810512"/>
-            <a:ext cx="2103120" cy="457200"/>
+          <p:cNvPr id="11" name="Shape 8"/>
+          <p:cNvSpPr/>
+          <p:nvPr/>
+        </p:nvSpPr>
+        <p:spPr>
+          <a:xfrm>
+            <a:off x="6748272" y="2103120"/>
+            <a:ext cx="640080" cy="640080"/>
+          </a:xfrm>
+          <a:prstGeom prst="ellipse">
+            <a:avLst/>
+          </a:prstGeom>
+          <a:solidFill>
+            <a:srgbClr val="2A6C9E"/>
+          </a:solidFill>
+          <a:ln/>
+        </p:spPr>
+      </p:sp>
+      <p:sp>
+        <p:nvSpPr>
+          <p:cNvPr id="12" name="Text 9"/>
+          <p:cNvSpPr txBox="1"/>
+          <p:nvPr/>
+        </p:nvSpPr>
+        <p:spPr>
+          <a:xfrm>
+            <a:off x="6748272" y="2103120"/>
+            <a:ext cx="640080" cy="640080"/>
+          </a:xfrm>
+          <a:prstGeom prst="rect">
+            <a:avLst/>
+          </a:prstGeom>
+          <a:noFill/>
+          <a:ln/>
+        </p:spPr>
+        <p:txBody>
+          <a:bodyPr wrap="square" lIns="0" tIns="0" rIns="0" bIns="0" rtlCol="0" anchor="ctr"/>
+          <a:lstStyle/>
+          <a:p>
+            <a:pPr rtl="1" algn="ctr" indent="0" marL="0">
+              <a:buNone/>
+            </a:pPr>
+            <a:r>
+              <a:rPr lang="ar-SA" altLang="en-US" sz="2000" b="1" dirty="0">
+                <a:solidFill>
+                  <a:srgbClr val="FFFFFF"/>
+                </a:solidFill>
+                <a:latin typeface="Arial" pitchFamily="34" charset="0"/>
+                <a:ea typeface="Arial" pitchFamily="34" charset="-122"/>
+                <a:cs typeface="Arial" pitchFamily="34" charset="-120"/>
+              </a:rPr>
+              <a:t>٢</a:t>
+            </a:r>
+            <a:endParaRPr lang="ar-SA" sz="2000" dirty="0"/>
+          </a:p>
+        </p:txBody>
+      </p:sp>
+      <p:sp>
+        <p:nvSpPr>
+          <p:cNvPr id="13" name="Shape 10"/>
+          <p:cNvSpPr/>
+          <p:nvPr/>
+        </p:nvSpPr>
+        <p:spPr>
+          <a:xfrm>
+            <a:off x="4462272" y="2103120"/>
+            <a:ext cx="640080" cy="640080"/>
+          </a:xfrm>
+          <a:prstGeom prst="ellipse">
+            <a:avLst/>
+          </a:prstGeom>
+          <a:solidFill>
+            <a:srgbClr val="FFFFFF"/>
+          </a:solidFill>
+          <a:ln/>
+        </p:spPr>
+      </p:sp>
+      <p:pic>
+        <p:nvPicPr>
+          <p:cNvPr id="14" name="Image 1" descr="preencoded.png">    </p:cNvPr>
+          <p:cNvPicPr>
+            <a:picLocks noChangeAspect="1"/>
+          </p:cNvPicPr>
+          <p:nvPr/>
+        </p:nvPicPr>
+        <p:blipFill>
+          <a:blip r:embed="rId2"/>
+          <a:stretch>
+            <a:fillRect/>
+          </a:stretch>
+        </p:blipFill>
+        <p:spPr>
+          <a:xfrm>
+            <a:off x="4628693" y="2269541"/>
+            <a:ext cx="307238" cy="307238"/>
+          </a:xfrm>
+          <a:prstGeom prst="rect">
+            <a:avLst/>
+          </a:prstGeom>
+        </p:spPr>
+      </p:pic>
+      <p:sp>
+        <p:nvSpPr>
+          <p:cNvPr id="15" name="Text 11"/>
+          <p:cNvSpPr txBox="1"/>
+          <p:nvPr/>
+        </p:nvSpPr>
+        <p:spPr>
+          <a:xfrm>
+            <a:off x="4462272" y="2971800"/>
+            <a:ext cx="2971800" cy="502920"/>
           </a:xfrm>
           <a:prstGeom prst="rect">
             <a:avLst/>
@@ -6497,7 +6221,7 @@
               <a:buNone/>
             </a:pPr>
             <a:r>
-              <a:rPr lang="ar-SA" altLang="en-US" sz="1700" b="1" dirty="0">
+              <a:rPr lang="ar-SA" altLang="en-US" sz="1800" b="1" dirty="0">
                 <a:solidFill>
                   <a:srgbClr val="1A2B3A"/>
                 </a:solidFill>
@@ -6505,22 +6229,22 @@
                 <a:ea typeface="Arial" pitchFamily="34" charset="-122"/>
                 <a:cs typeface="Arial" pitchFamily="34" charset="-120"/>
               </a:rPr>
-              <a:t>Starter</a:t>
-            </a:r>
-            <a:endParaRPr lang="ar-SA" sz="1700" dirty="0"/>
-          </a:p>
-        </p:txBody>
-      </p:sp>
-      <p:sp>
-        <p:nvSpPr>
-          <p:cNvPr id="12" name="Text 10"/>
-          <p:cNvSpPr txBox="1"/>
-          <p:nvPr/>
-        </p:nvSpPr>
-        <p:spPr>
-          <a:xfrm>
-            <a:off x="1920240" y="2267712"/>
-            <a:ext cx="5120640" cy="411480"/>
+              <a:t>ثلاثة مستخدمين</a:t>
+            </a:r>
+            <a:endParaRPr lang="ar-SA" sz="1800" dirty="0"/>
+          </a:p>
+        </p:txBody>
+      </p:sp>
+      <p:sp>
+        <p:nvSpPr>
+          <p:cNvPr id="16" name="Text 12"/>
+          <p:cNvSpPr txBox="1"/>
+          <p:nvPr/>
+        </p:nvSpPr>
+        <p:spPr>
+          <a:xfrm>
+            <a:off x="4462272" y="3520440"/>
+            <a:ext cx="2971800" cy="1188720"/>
           </a:xfrm>
           <a:prstGeom prst="rect">
             <a:avLst/>
@@ -6533,10 +6257,13 @@
           <a:lstStyle/>
           <a:p>
             <a:pPr rtl="1" algn="r" indent="0" marL="0">
-              <a:buNone/>
-            </a:pPr>
-            <a:r>
-              <a:rPr lang="ar-SA" altLang="en-US" sz="1250" dirty="0">
+              <a:lnSpc>
+                <a:spcPct val="125000"/>
+              </a:lnSpc>
+              <a:buNone/>
+            </a:pPr>
+            <a:r>
+              <a:rPr lang="ar-SA" altLang="en-US" sz="1300" dirty="0">
                 <a:solidFill>
                   <a:srgbClr val="5B6B7A"/>
                 </a:solidFill>
@@ -6544,79 +6271,26 @@
                 <a:ea typeface="Arial" pitchFamily="34" charset="-122"/>
                 <a:cs typeface="Arial" pitchFamily="34" charset="-120"/>
               </a:rPr>
-              <a:t>١٠ مستخدمين، و٦٠٠ سؤال شهريًا</a:t>
-            </a:r>
-            <a:endParaRPr lang="ar-SA" sz="1250" dirty="0"/>
-          </a:p>
-        </p:txBody>
-      </p:sp>
-      <p:sp>
-        <p:nvSpPr>
-          <p:cNvPr id="13" name="Text 11"/>
-          <p:cNvSpPr txBox="1"/>
-          <p:nvPr/>
-        </p:nvSpPr>
-        <p:spPr>
-          <a:xfrm>
-            <a:off x="914400" y="1920240"/>
-            <a:ext cx="2926080" cy="640080"/>
-          </a:xfrm>
-          <a:prstGeom prst="rect">
-            <a:avLst/>
-          </a:prstGeom>
-          <a:noFill/>
-          <a:ln/>
-        </p:spPr>
-        <p:txBody>
-          <a:bodyPr wrap="square" lIns="0" tIns="0" rIns="0" bIns="0" rtlCol="0" anchor="ctr"/>
-          <a:lstStyle/>
-          <a:p>
-            <a:pPr algn="l" indent="0" marL="0">
-              <a:buNone/>
-            </a:pPr>
-            <a:r>
-              <a:rPr lang="ar-SA" altLang="en-US" sz="2600" b="1" dirty="0">
-                <a:solidFill>
-                  <a:srgbClr val="1E5075"/>
-                </a:solidFill>
-                <a:latin typeface="Arial" pitchFamily="34" charset="0"/>
-                <a:ea typeface="Arial" pitchFamily="34" charset="-122"/>
-                <a:cs typeface="Arial" pitchFamily="34" charset="-120"/>
-              </a:rPr>
-              <a:t>899</a:t>
-            </a:r>
-            <a:pPr algn="l" indent="0" marL="0">
-              <a:buNone/>
-            </a:pPr>
-            <a:r>
-              <a:rPr lang="ar-SA" altLang="en-US" sz="1200" dirty="0">
-                <a:solidFill>
-                  <a:srgbClr val="5B6B7A"/>
-                </a:solidFill>
-                <a:latin typeface="Arial" pitchFamily="34" charset="0"/>
-                <a:ea typeface="Arial" pitchFamily="34" charset="-122"/>
-                <a:cs typeface="Arial" pitchFamily="34" charset="-120"/>
-              </a:rPr>
-              <a:t>  ريال/شهر</a:t>
-            </a:r>
-            <a:endParaRPr lang="ar-SA" sz="2600" dirty="0"/>
-          </a:p>
-        </p:txBody>
-      </p:sp>
-      <p:sp>
-        <p:nvSpPr>
-          <p:cNvPr id="14" name="Shape 12"/>
+              <a:t>موظفان يسألان فعلًا، ومسؤول يرى التحليلات</a:t>
+            </a:r>
+            <a:endParaRPr lang="ar-SA" sz="1300" dirty="0"/>
+          </a:p>
+        </p:txBody>
+      </p:sp>
+      <p:sp>
+        <p:nvSpPr>
+          <p:cNvPr id="17" name="Shape 13"/>
           <p:cNvSpPr/>
           <p:nvPr/>
         </p:nvSpPr>
         <p:spPr>
           <a:xfrm>
-            <a:off x="640080" y="3017520"/>
-            <a:ext cx="6675120" cy="1188720"/>
+            <a:off x="347472" y="1828800"/>
+            <a:ext cx="3520440" cy="3017520"/>
           </a:xfrm>
           <a:prstGeom prst="roundRect">
             <a:avLst>
-              <a:gd name="adj" fmla="val 9231"/>
+              <a:gd name="adj" fmla="val 3636"/>
             </a:avLst>
           </a:prstGeom>
           <a:solidFill>
@@ -6627,14 +6301,117 @@
       </p:sp>
       <p:sp>
         <p:nvSpPr>
-          <p:cNvPr id="15" name="Text 13"/>
-          <p:cNvSpPr txBox="1"/>
-          <p:nvPr/>
-        </p:nvSpPr>
-        <p:spPr>
-          <a:xfrm>
-            <a:off x="4937760" y="3182112"/>
-            <a:ext cx="2103120" cy="457200"/>
+          <p:cNvPr id="18" name="Shape 14"/>
+          <p:cNvSpPr/>
+          <p:nvPr/>
+        </p:nvSpPr>
+        <p:spPr>
+          <a:xfrm>
+            <a:off x="2907792" y="2103120"/>
+            <a:ext cx="640080" cy="640080"/>
+          </a:xfrm>
+          <a:prstGeom prst="ellipse">
+            <a:avLst/>
+          </a:prstGeom>
+          <a:solidFill>
+            <a:srgbClr val="2A6C9E"/>
+          </a:solidFill>
+          <a:ln/>
+        </p:spPr>
+      </p:sp>
+      <p:sp>
+        <p:nvSpPr>
+          <p:cNvPr id="19" name="Text 15"/>
+          <p:cNvSpPr txBox="1"/>
+          <p:nvPr/>
+        </p:nvSpPr>
+        <p:spPr>
+          <a:xfrm>
+            <a:off x="2907792" y="2103120"/>
+            <a:ext cx="640080" cy="640080"/>
+          </a:xfrm>
+          <a:prstGeom prst="rect">
+            <a:avLst/>
+          </a:prstGeom>
+          <a:noFill/>
+          <a:ln/>
+        </p:spPr>
+        <p:txBody>
+          <a:bodyPr wrap="square" lIns="0" tIns="0" rIns="0" bIns="0" rtlCol="0" anchor="ctr"/>
+          <a:lstStyle/>
+          <a:p>
+            <a:pPr rtl="1" algn="ctr" indent="0" marL="0">
+              <a:buNone/>
+            </a:pPr>
+            <a:r>
+              <a:rPr lang="ar-SA" altLang="en-US" sz="2000" b="1" dirty="0">
+                <a:solidFill>
+                  <a:srgbClr val="FFFFFF"/>
+                </a:solidFill>
+                <a:latin typeface="Arial" pitchFamily="34" charset="0"/>
+                <a:ea typeface="Arial" pitchFamily="34" charset="-122"/>
+                <a:cs typeface="Arial" pitchFamily="34" charset="-120"/>
+              </a:rPr>
+              <a:t>٣</a:t>
+            </a:r>
+            <a:endParaRPr lang="ar-SA" sz="2000" dirty="0"/>
+          </a:p>
+        </p:txBody>
+      </p:sp>
+      <p:sp>
+        <p:nvSpPr>
+          <p:cNvPr id="20" name="Shape 16"/>
+          <p:cNvSpPr/>
+          <p:nvPr/>
+        </p:nvSpPr>
+        <p:spPr>
+          <a:xfrm>
+            <a:off x="621792" y="2103120"/>
+            <a:ext cx="640080" cy="640080"/>
+          </a:xfrm>
+          <a:prstGeom prst="ellipse">
+            <a:avLst/>
+          </a:prstGeom>
+          <a:solidFill>
+            <a:srgbClr val="FFFFFF"/>
+          </a:solidFill>
+          <a:ln/>
+        </p:spPr>
+      </p:sp>
+      <p:pic>
+        <p:nvPicPr>
+          <p:cNvPr id="21" name="Image 2" descr="preencoded.png">    </p:cNvPr>
+          <p:cNvPicPr>
+            <a:picLocks noChangeAspect="1"/>
+          </p:cNvPicPr>
+          <p:nvPr/>
+        </p:nvPicPr>
+        <p:blipFill>
+          <a:blip r:embed="rId3"/>
+          <a:stretch>
+            <a:fillRect/>
+          </a:stretch>
+        </p:blipFill>
+        <p:spPr>
+          <a:xfrm>
+            <a:off x="788213" y="2269541"/>
+            <a:ext cx="307238" cy="307238"/>
+          </a:xfrm>
+          <a:prstGeom prst="rect">
+            <a:avLst/>
+          </a:prstGeom>
+        </p:spPr>
+      </p:pic>
+      <p:sp>
+        <p:nvSpPr>
+          <p:cNvPr id="22" name="Text 17"/>
+          <p:cNvSpPr txBox="1"/>
+          <p:nvPr/>
+        </p:nvSpPr>
+        <p:spPr>
+          <a:xfrm>
+            <a:off x="621792" y="2971800"/>
+            <a:ext cx="2971800" cy="502920"/>
           </a:xfrm>
           <a:prstGeom prst="rect">
             <a:avLst/>
@@ -6650,7 +6427,7 @@
               <a:buNone/>
             </a:pPr>
             <a:r>
-              <a:rPr lang="ar-SA" altLang="en-US" sz="1700" b="1" dirty="0">
+              <a:rPr lang="ar-SA" altLang="en-US" sz="1800" b="1" dirty="0">
                 <a:solidFill>
                   <a:srgbClr val="1A2B3A"/>
                 </a:solidFill>
@@ -6658,22 +6435,22 @@
                 <a:ea typeface="Arial" pitchFamily="34" charset="-122"/>
                 <a:cs typeface="Arial" pitchFamily="34" charset="-120"/>
               </a:rPr>
-              <a:t>Growth</a:t>
-            </a:r>
-            <a:endParaRPr lang="ar-SA" sz="1700" dirty="0"/>
-          </a:p>
-        </p:txBody>
-      </p:sp>
-      <p:sp>
-        <p:nvSpPr>
-          <p:cNvPr id="16" name="Text 14"/>
-          <p:cNvSpPr txBox="1"/>
-          <p:nvPr/>
-        </p:nvSpPr>
-        <p:spPr>
-          <a:xfrm>
-            <a:off x="1920240" y="3639312"/>
-            <a:ext cx="5120640" cy="411480"/>
+              <a:t>أسبوع واحد</a:t>
+            </a:r>
+            <a:endParaRPr lang="ar-SA" sz="1800" dirty="0"/>
+          </a:p>
+        </p:txBody>
+      </p:sp>
+      <p:sp>
+        <p:nvSpPr>
+          <p:cNvPr id="23" name="Text 18"/>
+          <p:cNvSpPr txBox="1"/>
+          <p:nvPr/>
+        </p:nvSpPr>
+        <p:spPr>
+          <a:xfrm>
+            <a:off x="621792" y="3520440"/>
+            <a:ext cx="2971800" cy="1188720"/>
           </a:xfrm>
           <a:prstGeom prst="rect">
             <a:avLst/>
@@ -6686,10 +6463,13 @@
           <a:lstStyle/>
           <a:p>
             <a:pPr rtl="1" algn="r" indent="0" marL="0">
-              <a:buNone/>
-            </a:pPr>
-            <a:r>
-              <a:rPr lang="ar-SA" altLang="en-US" sz="1250" dirty="0">
+              <a:lnSpc>
+                <a:spcPct val="125000"/>
+              </a:lnSpc>
+              <a:buNone/>
+            </a:pPr>
+            <a:r>
+              <a:rPr lang="ar-SA" altLang="en-US" sz="1300" dirty="0">
                 <a:solidFill>
                   <a:srgbClr val="5B6B7A"/>
                 </a:solidFill>
@@ -6697,38 +6477,38 @@
                 <a:ea typeface="Arial" pitchFamily="34" charset="-122"/>
                 <a:cs typeface="Arial" pitchFamily="34" charset="-120"/>
               </a:rPr>
-              <a:t>٣٠ مستخدمًا، و٢٬٠٠٠ سؤال شهريًا</a:t>
-            </a:r>
-            <a:endParaRPr lang="ar-SA" sz="1250" dirty="0"/>
-          </a:p>
-        </p:txBody>
-      </p:sp>
-      <p:sp>
-        <p:nvSpPr>
-          <p:cNvPr id="17" name="Text 15"/>
-          <p:cNvSpPr txBox="1"/>
-          <p:nvPr/>
-        </p:nvSpPr>
-        <p:spPr>
-          <a:xfrm>
-            <a:off x="914400" y="3291840"/>
-            <a:ext cx="2926080" cy="640080"/>
-          </a:xfrm>
-          <a:prstGeom prst="rect">
-            <a:avLst/>
-          </a:prstGeom>
-          <a:noFill/>
-          <a:ln/>
-        </p:spPr>
-        <p:txBody>
-          <a:bodyPr wrap="square" lIns="0" tIns="0" rIns="0" bIns="0" rtlCol="0" anchor="ctr"/>
-          <a:lstStyle/>
-          <a:p>
-            <a:pPr algn="l" indent="0" marL="0">
-              <a:buNone/>
-            </a:pPr>
-            <a:r>
-              <a:rPr lang="ar-SA" altLang="en-US" sz="2600" b="1" dirty="0">
+              <a:t>يسألون طبيعيًا — ثم نراجع معًا: ماذا أجاب، وماذا كشف</a:t>
+            </a:r>
+            <a:endParaRPr lang="ar-SA" sz="1300" dirty="0"/>
+          </a:p>
+        </p:txBody>
+      </p:sp>
+      <p:sp>
+        <p:nvSpPr>
+          <p:cNvPr id="24" name="Text 19"/>
+          <p:cNvSpPr txBox="1"/>
+          <p:nvPr/>
+        </p:nvSpPr>
+        <p:spPr>
+          <a:xfrm>
+            <a:off x="640080" y="5257800"/>
+            <a:ext cx="10908792" cy="502920"/>
+          </a:xfrm>
+          <a:prstGeom prst="rect">
+            <a:avLst/>
+          </a:prstGeom>
+          <a:noFill/>
+          <a:ln/>
+        </p:spPr>
+        <p:txBody>
+          <a:bodyPr wrap="square" lIns="0" tIns="0" rIns="0" bIns="0" rtlCol="0" anchor="ctr"/>
+          <a:lstStyle/>
+          <a:p>
+            <a:pPr rtl="1" algn="r" indent="0" marL="0">
+              <a:buNone/>
+            </a:pPr>
+            <a:r>
+              <a:rPr lang="ar-SA" altLang="en-US" sz="1500" b="1" dirty="0">
                 <a:solidFill>
                   <a:srgbClr val="1E5075"/>
                 </a:solidFill>
@@ -6736,215 +6516,9 @@
                 <a:ea typeface="Arial" pitchFamily="34" charset="-122"/>
                 <a:cs typeface="Arial" pitchFamily="34" charset="-120"/>
               </a:rPr>
-              <a:t>2,499</a:t>
-            </a:r>
-            <a:pPr algn="l" indent="0" marL="0">
-              <a:buNone/>
-            </a:pPr>
-            <a:r>
-              <a:rPr lang="ar-SA" altLang="en-US" sz="1200" dirty="0">
-                <a:solidFill>
-                  <a:srgbClr val="5B6B7A"/>
-                </a:solidFill>
-                <a:latin typeface="Arial" pitchFamily="34" charset="0"/>
-                <a:ea typeface="Arial" pitchFamily="34" charset="-122"/>
-                <a:cs typeface="Arial" pitchFamily="34" charset="-120"/>
-              </a:rPr>
-              <a:t>  ريال/شهر</a:t>
-            </a:r>
-            <a:endParaRPr lang="ar-SA" sz="2600" dirty="0"/>
-          </a:p>
-        </p:txBody>
-      </p:sp>
-      <p:sp>
-        <p:nvSpPr>
-          <p:cNvPr id="18" name="Shape 16"/>
-          <p:cNvSpPr/>
-          <p:nvPr/>
-        </p:nvSpPr>
-        <p:spPr>
-          <a:xfrm>
-            <a:off x="640080" y="4389120"/>
-            <a:ext cx="6675120" cy="1188720"/>
-          </a:xfrm>
-          <a:prstGeom prst="roundRect">
-            <a:avLst>
-              <a:gd name="adj" fmla="val 9231"/>
-            </a:avLst>
-          </a:prstGeom>
-          <a:solidFill>
-            <a:srgbClr val="EDF3F8"/>
-          </a:solidFill>
-          <a:ln/>
-        </p:spPr>
-      </p:sp>
-      <p:sp>
-        <p:nvSpPr>
-          <p:cNvPr id="19" name="Text 17"/>
-          <p:cNvSpPr txBox="1"/>
-          <p:nvPr/>
-        </p:nvSpPr>
-        <p:spPr>
-          <a:xfrm>
-            <a:off x="4937760" y="4553712"/>
-            <a:ext cx="2103120" cy="457200"/>
-          </a:xfrm>
-          <a:prstGeom prst="rect">
-            <a:avLst/>
-          </a:prstGeom>
-          <a:noFill/>
-          <a:ln/>
-        </p:spPr>
-        <p:txBody>
-          <a:bodyPr wrap="square" lIns="0" tIns="0" rIns="0" bIns="0" rtlCol="0" anchor="ctr"/>
-          <a:lstStyle/>
-          <a:p>
-            <a:pPr rtl="1" algn="r" indent="0" marL="0">
-              <a:buNone/>
-            </a:pPr>
-            <a:r>
-              <a:rPr lang="ar-SA" altLang="en-US" sz="1700" b="1" dirty="0">
-                <a:solidFill>
-                  <a:srgbClr val="1A2B3A"/>
-                </a:solidFill>
-                <a:latin typeface="Arial" pitchFamily="34" charset="0"/>
-                <a:ea typeface="Arial" pitchFamily="34" charset="-122"/>
-                <a:cs typeface="Arial" pitchFamily="34" charset="-120"/>
-              </a:rPr>
-              <a:t>Business</a:t>
-            </a:r>
-            <a:endParaRPr lang="ar-SA" sz="1700" dirty="0"/>
-          </a:p>
-        </p:txBody>
-      </p:sp>
-      <p:sp>
-        <p:nvSpPr>
-          <p:cNvPr id="20" name="Text 18"/>
-          <p:cNvSpPr txBox="1"/>
-          <p:nvPr/>
-        </p:nvSpPr>
-        <p:spPr>
-          <a:xfrm>
-            <a:off x="1920240" y="5010912"/>
-            <a:ext cx="5120640" cy="411480"/>
-          </a:xfrm>
-          <a:prstGeom prst="rect">
-            <a:avLst/>
-          </a:prstGeom>
-          <a:noFill/>
-          <a:ln/>
-        </p:spPr>
-        <p:txBody>
-          <a:bodyPr wrap="square" lIns="0" tIns="0" rIns="0" bIns="0" rtlCol="0" anchor="ctr"/>
-          <a:lstStyle/>
-          <a:p>
-            <a:pPr rtl="1" algn="r" indent="0" marL="0">
-              <a:buNone/>
-            </a:pPr>
-            <a:r>
-              <a:rPr lang="ar-SA" altLang="en-US" sz="1250" dirty="0">
-                <a:solidFill>
-                  <a:srgbClr val="5B6B7A"/>
-                </a:solidFill>
-                <a:latin typeface="Arial" pitchFamily="34" charset="0"/>
-                <a:ea typeface="Arial" pitchFamily="34" charset="-122"/>
-                <a:cs typeface="Arial" pitchFamily="34" charset="-120"/>
-              </a:rPr>
-              <a:t>٧٥ مستخدمًا، و٦٬٠٠٠ سؤال شهريًا</a:t>
-            </a:r>
-            <a:endParaRPr lang="ar-SA" sz="1250" dirty="0"/>
-          </a:p>
-        </p:txBody>
-      </p:sp>
-      <p:sp>
-        <p:nvSpPr>
-          <p:cNvPr id="21" name="Text 19"/>
-          <p:cNvSpPr txBox="1"/>
-          <p:nvPr/>
-        </p:nvSpPr>
-        <p:spPr>
-          <a:xfrm>
-            <a:off x="914400" y="4663440"/>
-            <a:ext cx="2926080" cy="640080"/>
-          </a:xfrm>
-          <a:prstGeom prst="rect">
-            <a:avLst/>
-          </a:prstGeom>
-          <a:noFill/>
-          <a:ln/>
-        </p:spPr>
-        <p:txBody>
-          <a:bodyPr wrap="square" lIns="0" tIns="0" rIns="0" bIns="0" rtlCol="0" anchor="ctr"/>
-          <a:lstStyle/>
-          <a:p>
-            <a:pPr algn="l" indent="0" marL="0">
-              <a:buNone/>
-            </a:pPr>
-            <a:r>
-              <a:rPr lang="ar-SA" altLang="en-US" sz="2600" b="1" dirty="0">
-                <a:solidFill>
-                  <a:srgbClr val="1E5075"/>
-                </a:solidFill>
-                <a:latin typeface="Arial" pitchFamily="34" charset="0"/>
-                <a:ea typeface="Arial" pitchFamily="34" charset="-122"/>
-                <a:cs typeface="Arial" pitchFamily="34" charset="-120"/>
-              </a:rPr>
-              <a:t>5,999</a:t>
-            </a:r>
-            <a:pPr algn="l" indent="0" marL="0">
-              <a:buNone/>
-            </a:pPr>
-            <a:r>
-              <a:rPr lang="ar-SA" altLang="en-US" sz="1200" dirty="0">
-                <a:solidFill>
-                  <a:srgbClr val="5B6B7A"/>
-                </a:solidFill>
-                <a:latin typeface="Arial" pitchFamily="34" charset="0"/>
-                <a:ea typeface="Arial" pitchFamily="34" charset="-122"/>
-                <a:cs typeface="Arial" pitchFamily="34" charset="-120"/>
-              </a:rPr>
-              <a:t>  ريال/شهر</a:t>
-            </a:r>
-            <a:endParaRPr lang="ar-SA" sz="2600" dirty="0"/>
-          </a:p>
-        </p:txBody>
-      </p:sp>
-      <p:sp>
-        <p:nvSpPr>
-          <p:cNvPr id="22" name="Text 20"/>
-          <p:cNvSpPr txBox="1"/>
-          <p:nvPr/>
-        </p:nvSpPr>
-        <p:spPr>
-          <a:xfrm>
-            <a:off x="640080" y="5806440"/>
-            <a:ext cx="10908792" cy="411480"/>
-          </a:xfrm>
-          <a:prstGeom prst="rect">
-            <a:avLst/>
-          </a:prstGeom>
-          <a:noFill/>
-          <a:ln/>
-        </p:spPr>
-        <p:txBody>
-          <a:bodyPr wrap="square" lIns="0" tIns="0" rIns="0" bIns="0" rtlCol="0" anchor="ctr"/>
-          <a:lstStyle/>
-          <a:p>
-            <a:pPr rtl="1" algn="r" indent="0" marL="0">
-              <a:buNone/>
-            </a:pPr>
-            <a:r>
-              <a:rPr lang="ar-SA" altLang="en-US" sz="1150" dirty="0">
-                <a:solidFill>
-                  <a:srgbClr val="5B6B7A"/>
-                </a:solidFill>
-                <a:latin typeface="Arial" pitchFamily="34" charset="0"/>
-                <a:ea typeface="Arial" pitchFamily="34" charset="-122"/>
-                <a:cs typeface="Arial" pitchFamily="34" charset="-120"/>
-              </a:rPr>
-              <a:t>الأسعار لا تشمل ضريبة القيمة المضافة · بلا رسوم تأسيس · الحدود قابلة للتخصيص للجهات الكبيرة</a:t>
-            </a:r>
-            <a:endParaRPr lang="ar-SA" sz="1150" dirty="0"/>
+              <a:t>وفي نهاية الأسبوع: تقرير قصير — نسبة ما أُجيب، وما كشفته الأسئلة من نقص في التوثيق.</a:t>
+            </a:r>
+            <a:endParaRPr lang="ar-SA" sz="1500" dirty="0"/>
           </a:p>
         </p:txBody>
       </p:sp>
@@ -6962,7 +6536,7 @@
     <p:bg>
       <p:bgPr>
         <a:solidFill>
-          <a:srgbClr val="FFFFFF"/>
+          <a:srgbClr val="132A3E"/>
         </a:solidFill>
       </p:bgPr>
     </p:bg>
@@ -6982,14 +6556,34 @@
       </p:grpSpPr>
       <p:sp>
         <p:nvSpPr>
-          <p:cNvPr id="2" name="Text 0"/>
-          <p:cNvSpPr txBox="1"/>
-          <p:nvPr/>
-        </p:nvSpPr>
-        <p:spPr>
-          <a:xfrm>
-            <a:off x="640080" y="411480"/>
-            <a:ext cx="10908792" cy="777240"/>
+          <p:cNvPr id="2" name="Shape 0"/>
+          <p:cNvSpPr/>
+          <p:nvPr/>
+        </p:nvSpPr>
+        <p:spPr>
+          <a:xfrm>
+            <a:off x="0" y="0"/>
+            <a:ext cx="12188952" cy="6858000"/>
+          </a:xfrm>
+          <a:prstGeom prst="rect">
+            <a:avLst/>
+          </a:prstGeom>
+          <a:solidFill>
+            <a:srgbClr val="0E2030"/>
+          </a:solidFill>
+          <a:ln/>
+        </p:spPr>
+      </p:sp>
+      <p:sp>
+        <p:nvSpPr>
+          <p:cNvPr id="3" name="Text 1"/>
+          <p:cNvSpPr txBox="1"/>
+          <p:nvPr/>
+        </p:nvSpPr>
+        <p:spPr>
+          <a:xfrm>
+            <a:off x="822960" y="2103120"/>
+            <a:ext cx="10543032" cy="914400"/>
           </a:xfrm>
           <a:prstGeom prst="rect">
             <a:avLst/>
@@ -7005,88 +6599,7 @@
               <a:buNone/>
             </a:pPr>
             <a:r>
-              <a:rPr lang="ar-SA" altLang="en-US" sz="3200" b="1" dirty="0">
-                <a:solidFill>
-                  <a:srgbClr val="1A2B3A"/>
-                </a:solidFill>
-                <a:latin typeface="Arial" pitchFamily="34" charset="0"/>
-                <a:ea typeface="Arial" pitchFamily="34" charset="-122"/>
-                <a:cs typeface="Arial" pitchFamily="34" charset="-120"/>
-              </a:rPr>
-              <a:t>كل ما نحتاجه لنبدأ غدًا</a:t>
-            </a:r>
-            <a:endParaRPr lang="ar-SA" sz="3200" dirty="0"/>
-          </a:p>
-        </p:txBody>
-      </p:sp>
-      <p:sp>
-        <p:nvSpPr>
-          <p:cNvPr id="3" name="Shape 1"/>
-          <p:cNvSpPr/>
-          <p:nvPr/>
-        </p:nvSpPr>
-        <p:spPr>
-          <a:xfrm>
-            <a:off x="8028432" y="1828800"/>
-            <a:ext cx="3520440" cy="3017520"/>
-          </a:xfrm>
-          <a:prstGeom prst="roundRect">
-            <a:avLst>
-              <a:gd name="adj" fmla="val 3636"/>
-            </a:avLst>
-          </a:prstGeom>
-          <a:solidFill>
-            <a:srgbClr val="EDF3F8"/>
-          </a:solidFill>
-          <a:ln/>
-        </p:spPr>
-      </p:sp>
-      <p:sp>
-        <p:nvSpPr>
-          <p:cNvPr id="4" name="Shape 2"/>
-          <p:cNvSpPr/>
-          <p:nvPr/>
-        </p:nvSpPr>
-        <p:spPr>
-          <a:xfrm>
-            <a:off x="10588752" y="2103120"/>
-            <a:ext cx="640080" cy="640080"/>
-          </a:xfrm>
-          <a:prstGeom prst="ellipse">
-            <a:avLst/>
-          </a:prstGeom>
-          <a:solidFill>
-            <a:srgbClr val="2A6C9E"/>
-          </a:solidFill>
-          <a:ln/>
-        </p:spPr>
-      </p:sp>
-      <p:sp>
-        <p:nvSpPr>
-          <p:cNvPr id="5" name="Text 3"/>
-          <p:cNvSpPr txBox="1"/>
-          <p:nvPr/>
-        </p:nvSpPr>
-        <p:spPr>
-          <a:xfrm>
-            <a:off x="10588752" y="2103120"/>
-            <a:ext cx="640080" cy="640080"/>
-          </a:xfrm>
-          <a:prstGeom prst="rect">
-            <a:avLst/>
-          </a:prstGeom>
-          <a:noFill/>
-          <a:ln/>
-        </p:spPr>
-        <p:txBody>
-          <a:bodyPr wrap="square" lIns="0" tIns="0" rIns="0" bIns="0" rtlCol="0" anchor="ctr"/>
-          <a:lstStyle/>
-          <a:p>
-            <a:pPr rtl="1" algn="ctr" indent="0" marL="0">
-              <a:buNone/>
-            </a:pPr>
-            <a:r>
-              <a:rPr lang="ar-SA" altLang="en-US" sz="2000" b="1" dirty="0">
+              <a:rPr lang="ar-SA" altLang="en-US" sz="4400" b="1" dirty="0">
                 <a:solidFill>
                   <a:srgbClr val="FFFFFF"/>
                 </a:solidFill>
@@ -7094,35 +6607,54 @@
                 <a:ea typeface="Arial" pitchFamily="34" charset="-122"/>
                 <a:cs typeface="Arial" pitchFamily="34" charset="-120"/>
               </a:rPr>
-              <a:t>١</a:t>
-            </a:r>
-            <a:endParaRPr lang="ar-SA" sz="2000" dirty="0"/>
-          </a:p>
-        </p:txBody>
-      </p:sp>
-      <p:sp>
-        <p:nvSpPr>
-          <p:cNvPr id="6" name="Shape 4"/>
-          <p:cNvSpPr/>
-          <p:nvPr/>
-        </p:nvSpPr>
-        <p:spPr>
-          <a:xfrm>
-            <a:off x="8302752" y="2103120"/>
-            <a:ext cx="640080" cy="640080"/>
-          </a:xfrm>
-          <a:prstGeom prst="ellipse">
-            <a:avLst/>
-          </a:prstGeom>
-          <a:solidFill>
-            <a:srgbClr val="FFFFFF"/>
-          </a:solidFill>
-          <a:ln/>
-        </p:spPr>
+              <a:t>أجيبوا مرة واحدة —</a:t>
+            </a:r>
+            <a:endParaRPr lang="ar-SA" sz="4400" dirty="0"/>
+          </a:p>
+        </p:txBody>
+      </p:sp>
+      <p:sp>
+        <p:nvSpPr>
+          <p:cNvPr id="4" name="Text 2"/>
+          <p:cNvSpPr txBox="1"/>
+          <p:nvPr/>
+        </p:nvSpPr>
+        <p:spPr>
+          <a:xfrm>
+            <a:off x="822960" y="3063240"/>
+            <a:ext cx="10543032" cy="914400"/>
+          </a:xfrm>
+          <a:prstGeom prst="rect">
+            <a:avLst/>
+          </a:prstGeom>
+          <a:noFill/>
+          <a:ln/>
+        </p:spPr>
+        <p:txBody>
+          <a:bodyPr wrap="square" lIns="0" tIns="0" rIns="0" bIns="0" rtlCol="0" anchor="ctr"/>
+          <a:lstStyle/>
+          <a:p>
+            <a:pPr rtl="1" algn="r" indent="0" marL="0">
+              <a:buNone/>
+            </a:pPr>
+            <a:r>
+              <a:rPr lang="ar-SA" altLang="en-US" sz="4400" b="1" dirty="0">
+                <a:solidFill>
+                  <a:srgbClr val="C9A227"/>
+                </a:solidFill>
+                <a:latin typeface="Arial" pitchFamily="34" charset="0"/>
+                <a:ea typeface="Arial" pitchFamily="34" charset="-122"/>
+                <a:cs typeface="Arial" pitchFamily="34" charset="-120"/>
+              </a:rPr>
+              <a:t>والنظام يجيب بعدكم.</a:t>
+            </a:r>
+            <a:endParaRPr lang="ar-SA" sz="4400" dirty="0"/>
+          </a:p>
+        </p:txBody>
       </p:sp>
       <p:pic>
         <p:nvPicPr>
-          <p:cNvPr id="7" name="Image 0" descr="preencoded.png">    </p:cNvPr>
+          <p:cNvPr id="5" name="Image 0" descr="preencoded.png">    </p:cNvPr>
           <p:cNvPicPr>
             <a:picLocks noChangeAspect="1"/>
           </p:cNvPicPr>
@@ -7136,8 +6668,8 @@
         </p:blipFill>
         <p:spPr>
           <a:xfrm>
-            <a:off x="8469173" y="2269541"/>
-            <a:ext cx="307238" cy="307238"/>
+            <a:off x="11045952" y="4709160"/>
+            <a:ext cx="292608" cy="292608"/>
           </a:xfrm>
           <a:prstGeom prst="rect">
             <a:avLst/>
@@ -7146,14 +6678,14 @@
       </p:pic>
       <p:sp>
         <p:nvSpPr>
-          <p:cNvPr id="8" name="Text 5"/>
-          <p:cNvSpPr txBox="1"/>
-          <p:nvPr/>
-        </p:nvSpPr>
-        <p:spPr>
-          <a:xfrm>
-            <a:off x="8302752" y="2971800"/>
-            <a:ext cx="2971800" cy="502920"/>
+          <p:cNvPr id="6" name="Text 3"/>
+          <p:cNvSpPr txBox="1"/>
+          <p:nvPr/>
+        </p:nvSpPr>
+        <p:spPr>
+          <a:xfrm>
+            <a:off x="822960" y="4645152"/>
+            <a:ext cx="10040112" cy="457200"/>
           </a:xfrm>
           <a:prstGeom prst="rect">
             <a:avLst/>
@@ -7169,166 +6701,23 @@
               <a:buNone/>
             </a:pPr>
             <a:r>
-              <a:rPr lang="ar-SA" altLang="en-US" sz="1800" b="1" dirty="0">
-                <a:solidFill>
-                  <a:srgbClr val="1A2B3A"/>
-                </a:solidFill>
-                <a:latin typeface="Arial" pitchFamily="34" charset="0"/>
-                <a:ea typeface="Arial" pitchFamily="34" charset="-122"/>
-                <a:cs typeface="Arial" pitchFamily="34" charset="-120"/>
-              </a:rPr>
-              <a:t>لائحة واحدة</a:t>
-            </a:r>
-            <a:endParaRPr lang="ar-SA" sz="1800" dirty="0"/>
-          </a:p>
-        </p:txBody>
-      </p:sp>
-      <p:sp>
-        <p:nvSpPr>
-          <p:cNvPr id="9" name="Text 6"/>
-          <p:cNvSpPr txBox="1"/>
-          <p:nvPr/>
-        </p:nvSpPr>
-        <p:spPr>
-          <a:xfrm>
-            <a:off x="8302752" y="3520440"/>
-            <a:ext cx="2971800" cy="1188720"/>
-          </a:xfrm>
-          <a:prstGeom prst="rect">
-            <a:avLst/>
-          </a:prstGeom>
-          <a:noFill/>
-          <a:ln/>
-        </p:spPr>
-        <p:txBody>
-          <a:bodyPr wrap="square" lIns="0" tIns="0" rIns="0" bIns="0" rtlCol="0" anchor="ctr"/>
-          <a:lstStyle/>
-          <a:p>
-            <a:pPr rtl="1" algn="r" indent="0" marL="0">
-              <a:lnSpc>
-                <a:spcPct val="125000"/>
-              </a:lnSpc>
-              <a:buNone/>
-            </a:pPr>
-            <a:r>
-              <a:rPr lang="ar-SA" altLang="en-US" sz="1300" dirty="0">
-                <a:solidFill>
-                  <a:srgbClr val="5B6B7A"/>
-                </a:solidFill>
-                <a:latin typeface="Arial" pitchFamily="34" charset="0"/>
-                <a:ea typeface="Arial" pitchFamily="34" charset="-122"/>
-                <a:cs typeface="Arial" pitchFamily="34" charset="-120"/>
-              </a:rPr>
-              <a:t>PDF أو Word — أي وثيقة يسأل عنها فريقكم كثيرًا</a:t>
-            </a:r>
-            <a:endParaRPr lang="ar-SA" sz="1300" dirty="0"/>
-          </a:p>
-        </p:txBody>
-      </p:sp>
-      <p:sp>
-        <p:nvSpPr>
-          <p:cNvPr id="10" name="Shape 7"/>
-          <p:cNvSpPr/>
-          <p:nvPr/>
-        </p:nvSpPr>
-        <p:spPr>
-          <a:xfrm>
-            <a:off x="4187952" y="1828800"/>
-            <a:ext cx="3520440" cy="3017520"/>
-          </a:xfrm>
-          <a:prstGeom prst="roundRect">
-            <a:avLst>
-              <a:gd name="adj" fmla="val 3636"/>
-            </a:avLst>
-          </a:prstGeom>
-          <a:solidFill>
-            <a:srgbClr val="EDF3F8"/>
-          </a:solidFill>
-          <a:ln/>
-        </p:spPr>
-      </p:sp>
-      <p:sp>
-        <p:nvSpPr>
-          <p:cNvPr id="11" name="Shape 8"/>
-          <p:cNvSpPr/>
-          <p:nvPr/>
-        </p:nvSpPr>
-        <p:spPr>
-          <a:xfrm>
-            <a:off x="6748272" y="2103120"/>
-            <a:ext cx="640080" cy="640080"/>
-          </a:xfrm>
-          <a:prstGeom prst="ellipse">
-            <a:avLst/>
-          </a:prstGeom>
-          <a:solidFill>
-            <a:srgbClr val="2A6C9E"/>
-          </a:solidFill>
-          <a:ln/>
-        </p:spPr>
-      </p:sp>
-      <p:sp>
-        <p:nvSpPr>
-          <p:cNvPr id="12" name="Text 9"/>
-          <p:cNvSpPr txBox="1"/>
-          <p:nvPr/>
-        </p:nvSpPr>
-        <p:spPr>
-          <a:xfrm>
-            <a:off x="6748272" y="2103120"/>
-            <a:ext cx="640080" cy="640080"/>
-          </a:xfrm>
-          <a:prstGeom prst="rect">
-            <a:avLst/>
-          </a:prstGeom>
-          <a:noFill/>
-          <a:ln/>
-        </p:spPr>
-        <p:txBody>
-          <a:bodyPr wrap="square" lIns="0" tIns="0" rIns="0" bIns="0" rtlCol="0" anchor="ctr"/>
-          <a:lstStyle/>
-          <a:p>
-            <a:pPr rtl="1" algn="ctr" indent="0" marL="0">
-              <a:buNone/>
-            </a:pPr>
-            <a:r>
-              <a:rPr lang="ar-SA" altLang="en-US" sz="2000" b="1" dirty="0">
-                <a:solidFill>
-                  <a:srgbClr val="FFFFFF"/>
-                </a:solidFill>
-                <a:latin typeface="Arial" pitchFamily="34" charset="0"/>
-                <a:ea typeface="Arial" pitchFamily="34" charset="-122"/>
-                <a:cs typeface="Arial" pitchFamily="34" charset="-120"/>
-              </a:rPr>
-              <a:t>٢</a:t>
-            </a:r>
-            <a:endParaRPr lang="ar-SA" sz="2000" dirty="0"/>
-          </a:p>
-        </p:txBody>
-      </p:sp>
-      <p:sp>
-        <p:nvSpPr>
-          <p:cNvPr id="13" name="Shape 10"/>
-          <p:cNvSpPr/>
-          <p:nvPr/>
-        </p:nvSpPr>
-        <p:spPr>
-          <a:xfrm>
-            <a:off x="4462272" y="2103120"/>
-            <a:ext cx="640080" cy="640080"/>
-          </a:xfrm>
-          <a:prstGeom prst="ellipse">
-            <a:avLst/>
-          </a:prstGeom>
-          <a:solidFill>
-            <a:srgbClr val="FFFFFF"/>
-          </a:solidFill>
-          <a:ln/>
-        </p:spPr>
+              <a:rPr lang="ar-SA" altLang="en-US" sz="1600" dirty="0">
+                <a:solidFill>
+                  <a:srgbClr val="E8F0F7"/>
+                </a:solidFill>
+                <a:latin typeface="Arial" pitchFamily="34" charset="0"/>
+                <a:ea typeface="Arial" pitchFamily="34" charset="-122"/>
+                <a:cs typeface="Arial" pitchFamily="34" charset="-120"/>
+              </a:rPr>
+              <a:t>ma3rifah-ai.vercel.app</a:t>
+            </a:r>
+            <a:endParaRPr lang="ar-SA" sz="1600" dirty="0"/>
+          </a:p>
+        </p:txBody>
       </p:sp>
       <p:pic>
         <p:nvPicPr>
-          <p:cNvPr id="14" name="Image 1" descr="preencoded.png">    </p:cNvPr>
+          <p:cNvPr id="7" name="Image 1" descr="preencoded.png">    </p:cNvPr>
           <p:cNvPicPr>
             <a:picLocks noChangeAspect="1"/>
           </p:cNvPicPr>
@@ -7342,8 +6731,8 @@
         </p:blipFill>
         <p:spPr>
           <a:xfrm>
-            <a:off x="4628693" y="2269541"/>
-            <a:ext cx="307238" cy="307238"/>
+            <a:off x="11045952" y="5257800"/>
+            <a:ext cx="292608" cy="292608"/>
           </a:xfrm>
           <a:prstGeom prst="rect">
             <a:avLst/>
@@ -7352,14 +6741,14 @@
       </p:pic>
       <p:sp>
         <p:nvSpPr>
-          <p:cNvPr id="15" name="Text 11"/>
-          <p:cNvSpPr txBox="1"/>
-          <p:nvPr/>
-        </p:nvSpPr>
-        <p:spPr>
-          <a:xfrm>
-            <a:off x="4462272" y="2971800"/>
-            <a:ext cx="2971800" cy="502920"/>
+          <p:cNvPr id="8" name="Text 4"/>
+          <p:cNvSpPr txBox="1"/>
+          <p:nvPr/>
+        </p:nvSpPr>
+        <p:spPr>
+          <a:xfrm>
+            <a:off x="822960" y="5193792"/>
+            <a:ext cx="10040112" cy="457200"/>
           </a:xfrm>
           <a:prstGeom prst="rect">
             <a:avLst/>
@@ -7375,304 +6764,17 @@
               <a:buNone/>
             </a:pPr>
             <a:r>
-              <a:rPr lang="ar-SA" altLang="en-US" sz="1800" b="1" dirty="0">
-                <a:solidFill>
-                  <a:srgbClr val="1A2B3A"/>
-                </a:solidFill>
-                <a:latin typeface="Arial" pitchFamily="34" charset="0"/>
-                <a:ea typeface="Arial" pitchFamily="34" charset="-122"/>
-                <a:cs typeface="Arial" pitchFamily="34" charset="-120"/>
-              </a:rPr>
-              <a:t>ثلاثة مستخدمين</a:t>
-            </a:r>
-            <a:endParaRPr lang="ar-SA" sz="1800" dirty="0"/>
-          </a:p>
-        </p:txBody>
-      </p:sp>
-      <p:sp>
-        <p:nvSpPr>
-          <p:cNvPr id="16" name="Text 12"/>
-          <p:cNvSpPr txBox="1"/>
-          <p:nvPr/>
-        </p:nvSpPr>
-        <p:spPr>
-          <a:xfrm>
-            <a:off x="4462272" y="3520440"/>
-            <a:ext cx="2971800" cy="1188720"/>
-          </a:xfrm>
-          <a:prstGeom prst="rect">
-            <a:avLst/>
-          </a:prstGeom>
-          <a:noFill/>
-          <a:ln/>
-        </p:spPr>
-        <p:txBody>
-          <a:bodyPr wrap="square" lIns="0" tIns="0" rIns="0" bIns="0" rtlCol="0" anchor="ctr"/>
-          <a:lstStyle/>
-          <a:p>
-            <a:pPr rtl="1" algn="r" indent="0" marL="0">
-              <a:lnSpc>
-                <a:spcPct val="125000"/>
-              </a:lnSpc>
-              <a:buNone/>
-            </a:pPr>
-            <a:r>
-              <a:rPr lang="ar-SA" altLang="en-US" sz="1300" dirty="0">
-                <a:solidFill>
-                  <a:srgbClr val="5B6B7A"/>
-                </a:solidFill>
-                <a:latin typeface="Arial" pitchFamily="34" charset="0"/>
-                <a:ea typeface="Arial" pitchFamily="34" charset="-122"/>
-                <a:cs typeface="Arial" pitchFamily="34" charset="-120"/>
-              </a:rPr>
-              <a:t>موظفان يسألان فعلًا، ومسؤول يرى التحليلات</a:t>
-            </a:r>
-            <a:endParaRPr lang="ar-SA" sz="1300" dirty="0"/>
-          </a:p>
-        </p:txBody>
-      </p:sp>
-      <p:sp>
-        <p:nvSpPr>
-          <p:cNvPr id="17" name="Shape 13"/>
-          <p:cNvSpPr/>
-          <p:nvPr/>
-        </p:nvSpPr>
-        <p:spPr>
-          <a:xfrm>
-            <a:off x="347472" y="1828800"/>
-            <a:ext cx="3520440" cy="3017520"/>
-          </a:xfrm>
-          <a:prstGeom prst="roundRect">
-            <a:avLst>
-              <a:gd name="adj" fmla="val 3636"/>
-            </a:avLst>
-          </a:prstGeom>
-          <a:solidFill>
-            <a:srgbClr val="EDF3F8"/>
-          </a:solidFill>
-          <a:ln/>
-        </p:spPr>
-      </p:sp>
-      <p:sp>
-        <p:nvSpPr>
-          <p:cNvPr id="18" name="Shape 14"/>
-          <p:cNvSpPr/>
-          <p:nvPr/>
-        </p:nvSpPr>
-        <p:spPr>
-          <a:xfrm>
-            <a:off x="2907792" y="2103120"/>
-            <a:ext cx="640080" cy="640080"/>
-          </a:xfrm>
-          <a:prstGeom prst="ellipse">
-            <a:avLst/>
-          </a:prstGeom>
-          <a:solidFill>
-            <a:srgbClr val="2A6C9E"/>
-          </a:solidFill>
-          <a:ln/>
-        </p:spPr>
-      </p:sp>
-      <p:sp>
-        <p:nvSpPr>
-          <p:cNvPr id="19" name="Text 15"/>
-          <p:cNvSpPr txBox="1"/>
-          <p:nvPr/>
-        </p:nvSpPr>
-        <p:spPr>
-          <a:xfrm>
-            <a:off x="2907792" y="2103120"/>
-            <a:ext cx="640080" cy="640080"/>
-          </a:xfrm>
-          <a:prstGeom prst="rect">
-            <a:avLst/>
-          </a:prstGeom>
-          <a:noFill/>
-          <a:ln/>
-        </p:spPr>
-        <p:txBody>
-          <a:bodyPr wrap="square" lIns="0" tIns="0" rIns="0" bIns="0" rtlCol="0" anchor="ctr"/>
-          <a:lstStyle/>
-          <a:p>
-            <a:pPr rtl="1" algn="ctr" indent="0" marL="0">
-              <a:buNone/>
-            </a:pPr>
-            <a:r>
-              <a:rPr lang="ar-SA" altLang="en-US" sz="2000" b="1" dirty="0">
-                <a:solidFill>
-                  <a:srgbClr val="FFFFFF"/>
-                </a:solidFill>
-                <a:latin typeface="Arial" pitchFamily="34" charset="0"/>
-                <a:ea typeface="Arial" pitchFamily="34" charset="-122"/>
-                <a:cs typeface="Arial" pitchFamily="34" charset="-120"/>
-              </a:rPr>
-              <a:t>٣</a:t>
-            </a:r>
-            <a:endParaRPr lang="ar-SA" sz="2000" dirty="0"/>
-          </a:p>
-        </p:txBody>
-      </p:sp>
-      <p:sp>
-        <p:nvSpPr>
-          <p:cNvPr id="20" name="Shape 16"/>
-          <p:cNvSpPr/>
-          <p:nvPr/>
-        </p:nvSpPr>
-        <p:spPr>
-          <a:xfrm>
-            <a:off x="621792" y="2103120"/>
-            <a:ext cx="640080" cy="640080"/>
-          </a:xfrm>
-          <a:prstGeom prst="ellipse">
-            <a:avLst/>
-          </a:prstGeom>
-          <a:solidFill>
-            <a:srgbClr val="FFFFFF"/>
-          </a:solidFill>
-          <a:ln/>
-        </p:spPr>
-      </p:sp>
-      <p:pic>
-        <p:nvPicPr>
-          <p:cNvPr id="21" name="Image 2" descr="preencoded.png">    </p:cNvPr>
-          <p:cNvPicPr>
-            <a:picLocks noChangeAspect="1"/>
-          </p:cNvPicPr>
-          <p:nvPr/>
-        </p:nvPicPr>
-        <p:blipFill>
-          <a:blip r:embed="rId3"/>
-          <a:stretch>
-            <a:fillRect/>
-          </a:stretch>
-        </p:blipFill>
-        <p:spPr>
-          <a:xfrm>
-            <a:off x="788213" y="2269541"/>
-            <a:ext cx="307238" cy="307238"/>
-          </a:xfrm>
-          <a:prstGeom prst="rect">
-            <a:avLst/>
-          </a:prstGeom>
-        </p:spPr>
-      </p:pic>
-      <p:sp>
-        <p:nvSpPr>
-          <p:cNvPr id="22" name="Text 17"/>
-          <p:cNvSpPr txBox="1"/>
-          <p:nvPr/>
-        </p:nvSpPr>
-        <p:spPr>
-          <a:xfrm>
-            <a:off x="621792" y="2971800"/>
-            <a:ext cx="2971800" cy="502920"/>
-          </a:xfrm>
-          <a:prstGeom prst="rect">
-            <a:avLst/>
-          </a:prstGeom>
-          <a:noFill/>
-          <a:ln/>
-        </p:spPr>
-        <p:txBody>
-          <a:bodyPr wrap="square" lIns="0" tIns="0" rIns="0" bIns="0" rtlCol="0" anchor="ctr"/>
-          <a:lstStyle/>
-          <a:p>
-            <a:pPr rtl="1" algn="r" indent="0" marL="0">
-              <a:buNone/>
-            </a:pPr>
-            <a:r>
-              <a:rPr lang="ar-SA" altLang="en-US" sz="1800" b="1" dirty="0">
-                <a:solidFill>
-                  <a:srgbClr val="1A2B3A"/>
-                </a:solidFill>
-                <a:latin typeface="Arial" pitchFamily="34" charset="0"/>
-                <a:ea typeface="Arial" pitchFamily="34" charset="-122"/>
-                <a:cs typeface="Arial" pitchFamily="34" charset="-120"/>
-              </a:rPr>
-              <a:t>أسبوع واحد</a:t>
-            </a:r>
-            <a:endParaRPr lang="ar-SA" sz="1800" dirty="0"/>
-          </a:p>
-        </p:txBody>
-      </p:sp>
-      <p:sp>
-        <p:nvSpPr>
-          <p:cNvPr id="23" name="Text 18"/>
-          <p:cNvSpPr txBox="1"/>
-          <p:nvPr/>
-        </p:nvSpPr>
-        <p:spPr>
-          <a:xfrm>
-            <a:off x="621792" y="3520440"/>
-            <a:ext cx="2971800" cy="1188720"/>
-          </a:xfrm>
-          <a:prstGeom prst="rect">
-            <a:avLst/>
-          </a:prstGeom>
-          <a:noFill/>
-          <a:ln/>
-        </p:spPr>
-        <p:txBody>
-          <a:bodyPr wrap="square" lIns="0" tIns="0" rIns="0" bIns="0" rtlCol="0" anchor="ctr"/>
-          <a:lstStyle/>
-          <a:p>
-            <a:pPr rtl="1" algn="r" indent="0" marL="0">
-              <a:lnSpc>
-                <a:spcPct val="125000"/>
-              </a:lnSpc>
-              <a:buNone/>
-            </a:pPr>
-            <a:r>
-              <a:rPr lang="ar-SA" altLang="en-US" sz="1300" dirty="0">
-                <a:solidFill>
-                  <a:srgbClr val="5B6B7A"/>
-                </a:solidFill>
-                <a:latin typeface="Arial" pitchFamily="34" charset="0"/>
-                <a:ea typeface="Arial" pitchFamily="34" charset="-122"/>
-                <a:cs typeface="Arial" pitchFamily="34" charset="-120"/>
-              </a:rPr>
-              <a:t>يسألون طبيعيًا — ثم نراجع معًا: ماذا أجاب، وماذا كشف</a:t>
-            </a:r>
-            <a:endParaRPr lang="ar-SA" sz="1300" dirty="0"/>
-          </a:p>
-        </p:txBody>
-      </p:sp>
-      <p:sp>
-        <p:nvSpPr>
-          <p:cNvPr id="24" name="Text 19"/>
-          <p:cNvSpPr txBox="1"/>
-          <p:nvPr/>
-        </p:nvSpPr>
-        <p:spPr>
-          <a:xfrm>
-            <a:off x="640080" y="5257800"/>
-            <a:ext cx="10908792" cy="502920"/>
-          </a:xfrm>
-          <a:prstGeom prst="rect">
-            <a:avLst/>
-          </a:prstGeom>
-          <a:noFill/>
-          <a:ln/>
-        </p:spPr>
-        <p:txBody>
-          <a:bodyPr wrap="square" lIns="0" tIns="0" rIns="0" bIns="0" rtlCol="0" anchor="ctr"/>
-          <a:lstStyle/>
-          <a:p>
-            <a:pPr rtl="1" algn="r" indent="0" marL="0">
-              <a:buNone/>
-            </a:pPr>
-            <a:r>
-              <a:rPr lang="ar-SA" altLang="en-US" sz="1500" b="1" dirty="0">
-                <a:solidFill>
-                  <a:srgbClr val="1E5075"/>
-                </a:solidFill>
-                <a:latin typeface="Arial" pitchFamily="34" charset="0"/>
-                <a:ea typeface="Arial" pitchFamily="34" charset="-122"/>
-                <a:cs typeface="Arial" pitchFamily="34" charset="-120"/>
-              </a:rPr>
-              <a:t>وفي نهاية الأسبوع: تقرير قصير — نسبة ما أُجيب، وما كشفته الأسئلة من نقص في التوثيق.</a:t>
-            </a:r>
-            <a:endParaRPr lang="ar-SA" sz="1500" dirty="0"/>
+              <a:rPr lang="ar-SA" altLang="en-US" sz="1600" dirty="0">
+                <a:solidFill>
+                  <a:srgbClr val="E8F0F7"/>
+                </a:solidFill>
+                <a:latin typeface="Arial" pitchFamily="34" charset="0"/>
+                <a:ea typeface="Arial" pitchFamily="34" charset="-122"/>
+                <a:cs typeface="Arial" pitchFamily="34" charset="-120"/>
+              </a:rPr>
+              <a:t>manal.alareqi@gmail.com</a:t>
+            </a:r>
+            <a:endParaRPr lang="ar-SA" sz="1600" dirty="0"/>
           </a:p>
         </p:txBody>
       </p:sp>
